--- a/Agile_Dev_Assist_5_slides.pptx
+++ b/Agile_Dev_Assist_5_slides.pptx
@@ -1,19 +1,22 @@
 
 <file path=ppt/presentation.xml><?xml version="1.0" encoding="utf-8"?>
-<p:presentation xmlns:a="http://schemas.openxmlformats.org/drawingml/2006/main" xmlns:r="http://schemas.openxmlformats.org/officeDocument/2006/relationships" xmlns:p="http://schemas.openxmlformats.org/presentationml/2006/main" saveSubsetFonts="1" autoCompressPictures="0">
+<p:presentation xmlns:a="http://schemas.openxmlformats.org/drawingml/2006/main" xmlns:r="http://schemas.openxmlformats.org/officeDocument/2006/relationships" xmlns:p="http://schemas.openxmlformats.org/presentationml/2006/main" autoCompressPictures="0">
   <p:sldMasterIdLst>
     <p:sldMasterId id="2147483648" r:id="rId1"/>
   </p:sldMasterIdLst>
+  <p:notesMasterIdLst>
+    <p:notesMasterId r:id="rId4"/>
+  </p:notesMasterIdLst>
   <p:sldIdLst>
-    <p:sldId id="256" r:id="rId2"/>
-    <p:sldId id="257" r:id="rId3"/>
-    <p:sldId id="258" r:id="rId4"/>
-    <p:sldId id="259" r:id="rId5"/>
-    <p:sldId id="260" r:id="rId6"/>
+    <p:sldId id="256" r:id="rId3"/>
+    <p:sldId id="261" r:id="rId5"/>
+    <p:sldId id="257" r:id="rId6"/>
+    <p:sldId id="258" r:id="rId7"/>
+    <p:sldId id="262" r:id="rId8"/>
+    <p:sldId id="259" r:id="rId9"/>
+    <p:sldId id="260" r:id="rId10"/>
+    <p:sldId id="263" r:id="rId11"/>
   </p:sldIdLst>
-  <p:notesMasterIdLst>
-    <p:notesMasterId r:id="rId7"/>
-  </p:notesMasterIdLst>
   <p:sldSz cx="12192000" cy="6858000"/>
   <p:notesSz cx="6858000" cy="12192000"/>
   <p:defaultTextStyle>
@@ -193,7 +196,6 @@
           <a:p>
             <a:fld id="{5282F153-3F37-0F45-9E97-73ACFA13230C}" type="datetimeFigureOut">
               <a:rPr lang="en-US"/>
-              <a:t>7/23/19</a:t>
             </a:fld>
             <a:endParaRPr lang="en-US"/>
           </a:p>
@@ -260,6 +262,7 @@
               <a:rPr lang="en-US"/>
               <a:t>Click to edit Master text styles</a:t>
             </a:r>
+            <a:endParaRPr lang="en-US"/>
           </a:p>
           <a:p>
             <a:pPr lvl="1"/>
@@ -267,6 +270,7 @@
               <a:rPr lang="en-US"/>
               <a:t>Second level</a:t>
             </a:r>
+            <a:endParaRPr lang="en-US"/>
           </a:p>
           <a:p>
             <a:pPr lvl="2"/>
@@ -274,6 +278,7 @@
               <a:rPr lang="en-US"/>
               <a:t>Third level</a:t>
             </a:r>
+            <a:endParaRPr lang="en-US"/>
           </a:p>
           <a:p>
             <a:pPr lvl="3"/>
@@ -281,6 +286,7 @@
               <a:rPr lang="en-US"/>
               <a:t>Fourth level</a:t>
             </a:r>
+            <a:endParaRPr lang="en-US"/>
           </a:p>
           <a:p>
             <a:pPr lvl="4"/>
@@ -288,6 +294,7 @@
               <a:rPr lang="en-US"/>
               <a:t>Fifth level</a:t>
             </a:r>
+            <a:endParaRPr lang="en-US"/>
           </a:p>
         </p:txBody>
       </p:sp>
@@ -351,18 +358,12 @@
           <a:p>
             <a:fld id="{CE5E9CC1-C706-0F49-92D6-E571CC5EEA8F}" type="slidenum">
               <a:rPr lang="en-US"/>
-              <a:t>‹#›</a:t>
             </a:fld>
             <a:endParaRPr lang="en-US"/>
           </a:p>
         </p:txBody>
       </p:sp>
     </p:spTree>
-    <p:extLst>
-      <p:ext uri="{BB962C8B-B14F-4D97-AF65-F5344CB8AC3E}">
-        <p14:creationId xmlns:p14="http://schemas.microsoft.com/office/powerpoint/2010/main" val="1024086991"/>
-      </p:ext>
-    </p:extLst>
   </p:cSld>
   <p:clrMap bg1="lt1" tx1="dk1" bg2="lt2" tx2="dk2" accent1="accent1" accent2="accent2" accent3="accent3" accent4="accent4" accent5="accent5" accent6="accent6" hlink="hlink" folHlink="folHlink"/>
   <p:notesStyle>
@@ -529,18 +530,12 @@
           <a:p>
             <a:fld id="{F7021451-1387-4CA6-816F-3879F97B5CBC}" type="slidenum">
               <a:rPr lang="en-US"/>
-              <a:t>1</a:t>
             </a:fld>
             <a:endParaRPr lang="en-US"/>
           </a:p>
         </p:txBody>
       </p:sp>
     </p:spTree>
-    <p:extLst>
-      <p:ext uri="{BB962C8B-B14F-4D97-AF65-F5344CB8AC3E}">
-        <p14:creationId xmlns:p14="http://schemas.microsoft.com/office/powerpoint/2010/main" val="1024086991"/>
-      </p:ext>
-    </p:extLst>
   </p:cSld>
   <p:clrMapOvr>
     <a:masterClrMapping/>
@@ -617,18 +612,12 @@
           <a:p>
             <a:fld id="{F7021451-1387-4CA6-816F-3879F97B5CBC}" type="slidenum">
               <a:rPr lang="en-US"/>
-              <a:t>2</a:t>
             </a:fld>
             <a:endParaRPr lang="en-US"/>
           </a:p>
         </p:txBody>
       </p:sp>
     </p:spTree>
-    <p:extLst>
-      <p:ext uri="{BB962C8B-B14F-4D97-AF65-F5344CB8AC3E}">
-        <p14:creationId xmlns:p14="http://schemas.microsoft.com/office/powerpoint/2010/main" val="1024086991"/>
-      </p:ext>
-    </p:extLst>
   </p:cSld>
   <p:clrMapOvr>
     <a:masterClrMapping/>
@@ -705,18 +694,12 @@
           <a:p>
             <a:fld id="{F7021451-1387-4CA6-816F-3879F97B5CBC}" type="slidenum">
               <a:rPr lang="en-US"/>
-              <a:t>3</a:t>
             </a:fld>
             <a:endParaRPr lang="en-US"/>
           </a:p>
         </p:txBody>
       </p:sp>
     </p:spTree>
-    <p:extLst>
-      <p:ext uri="{BB962C8B-B14F-4D97-AF65-F5344CB8AC3E}">
-        <p14:creationId xmlns:p14="http://schemas.microsoft.com/office/powerpoint/2010/main" val="1024086991"/>
-      </p:ext>
-    </p:extLst>
   </p:cSld>
   <p:clrMapOvr>
     <a:masterClrMapping/>
@@ -793,18 +776,12 @@
           <a:p>
             <a:fld id="{F7021451-1387-4CA6-816F-3879F97B5CBC}" type="slidenum">
               <a:rPr lang="en-US"/>
-              <a:t>4</a:t>
             </a:fld>
             <a:endParaRPr lang="en-US"/>
           </a:p>
         </p:txBody>
       </p:sp>
     </p:spTree>
-    <p:extLst>
-      <p:ext uri="{BB962C8B-B14F-4D97-AF65-F5344CB8AC3E}">
-        <p14:creationId xmlns:p14="http://schemas.microsoft.com/office/powerpoint/2010/main" val="1024086991"/>
-      </p:ext>
-    </p:extLst>
   </p:cSld>
   <p:clrMapOvr>
     <a:masterClrMapping/>
@@ -881,18 +858,12 @@
           <a:p>
             <a:fld id="{F7021451-1387-4CA6-816F-3879F97B5CBC}" type="slidenum">
               <a:rPr lang="en-US"/>
-              <a:t>5</a:t>
             </a:fld>
             <a:endParaRPr lang="en-US"/>
           </a:p>
         </p:txBody>
       </p:sp>
     </p:spTree>
-    <p:extLst>
-      <p:ext uri="{BB962C8B-B14F-4D97-AF65-F5344CB8AC3E}">
-        <p14:creationId xmlns:p14="http://schemas.microsoft.com/office/powerpoint/2010/main" val="1024086991"/>
-      </p:ext>
-    </p:extLst>
   </p:cSld>
   <p:clrMapOvr>
     <a:masterClrMapping/>
@@ -938,6 +909,7 @@
         <a:solidFill>
           <a:srgbClr val="1B1F3B"/>
         </a:solidFill>
+        <a:effectLst/>
       </p:bgPr>
     </p:bg>
     <p:spTree>
@@ -959,7 +931,7 @@
           <p:cNvPr id="2" name="Text 0"/>
           <p:cNvSpPr/>
           <p:nvPr>
-            <p:ph idx="100" type="title" hasCustomPrompt="1"/>
+            <p:ph type="title" idx="100" hasCustomPrompt="1"/>
           </p:nvPr>
         </p:nvSpPr>
         <p:spPr>
@@ -971,12 +943,11 @@
             <a:avLst/>
           </a:prstGeom>
           <a:noFill/>
-          <a:ln/>
         </p:spPr>
         <p:txBody>
           <a:bodyPr wrap="square" rtlCol="0"/>
           <a:lstStyle>
-            <a:lvl1pPr algn="l" indent="0" marL="0">
+            <a:lvl1pPr marL="0" indent="0" algn="l">
               <a:buNone/>
               <a:defRPr lang="en-US" sz="4200" b="1" dirty="0">
                 <a:solidFill>
@@ -986,7 +957,7 @@
             </a:lvl1pPr>
           </a:lstStyle>
           <a:p>
-            <a:pPr algn="l" indent="0" marL="0">
+            <a:pPr marL="0" indent="0" algn="l">
               <a:buNone/>
             </a:pPr>
             <a:endParaRPr lang="en-US" sz="4200" dirty="0"/>
@@ -998,7 +969,7 @@
           <p:cNvPr id="3" name="Text 0"/>
           <p:cNvSpPr/>
           <p:nvPr>
-            <p:ph idx="101" type="body" hasCustomPrompt="1"/>
+            <p:ph type="body" idx="101" hasCustomPrompt="1"/>
           </p:nvPr>
         </p:nvSpPr>
         <p:spPr>
@@ -1010,12 +981,11 @@
             <a:avLst/>
           </a:prstGeom>
           <a:noFill/>
-          <a:ln/>
         </p:spPr>
         <p:txBody>
           <a:bodyPr wrap="square" rtlCol="0"/>
           <a:lstStyle>
-            <a:lvl1pPr algn="l" indent="0" marL="0">
+            <a:lvl1pPr marL="0" indent="0" algn="l">
               <a:buNone/>
               <a:defRPr lang="en-US" sz="2000" dirty="0">
                 <a:solidFill>
@@ -1025,7 +995,7 @@
             </a:lvl1pPr>
           </a:lstStyle>
           <a:p>
-            <a:pPr algn="l" indent="0" marL="0">
+            <a:pPr marL="0" indent="0" algn="l">
               <a:buNone/>
             </a:pPr>
             <a:endParaRPr lang="en-US" sz="2000" dirty="0"/>
@@ -1048,6 +1018,7 @@
         <a:solidFill>
           <a:srgbClr val="FFFFFF"/>
         </a:solidFill>
+        <a:effectLst/>
       </p:bgPr>
     </p:bg>
     <p:spTree>
@@ -1069,7 +1040,7 @@
           <p:cNvPr id="2" name="Text 0"/>
           <p:cNvSpPr/>
           <p:nvPr>
-            <p:ph idx="100" type="title" hasCustomPrompt="1"/>
+            <p:ph type="title" idx="100" hasCustomPrompt="1"/>
           </p:nvPr>
         </p:nvSpPr>
         <p:spPr>
@@ -1081,12 +1052,11 @@
             <a:avLst/>
           </a:prstGeom>
           <a:noFill/>
-          <a:ln/>
         </p:spPr>
         <p:txBody>
           <a:bodyPr wrap="square" rtlCol="0"/>
           <a:lstStyle>
-            <a:lvl1pPr algn="l" indent="0" marL="0">
+            <a:lvl1pPr marL="0" indent="0" algn="l">
               <a:buNone/>
               <a:defRPr lang="en-US" sz="3000" b="1" dirty="0">
                 <a:solidFill>
@@ -1096,7 +1066,7 @@
             </a:lvl1pPr>
           </a:lstStyle>
           <a:p>
-            <a:pPr algn="l" indent="0" marL="0">
+            <a:pPr marL="0" indent="0" algn="l">
               <a:buNone/>
             </a:pPr>
             <a:endParaRPr lang="en-US" sz="3000" dirty="0"/>
@@ -1118,13 +1088,12 @@
             <a:avLst/>
           </a:prstGeom>
           <a:noFill/>
-          <a:ln/>
         </p:spPr>
         <p:txBody>
           <a:bodyPr wrap="square" lIns="0" tIns="0" rIns="0" bIns="0" rtlCol="0" anchor="ctr"/>
           <a:lstStyle/>
           <a:p>
-            <a:pPr indent="0" marL="0">
+            <a:pPr marL="0" indent="0">
               <a:buNone/>
             </a:pPr>
             <a:r>
@@ -1157,11 +1126,6 @@
           <a:prstGeom prst="rect">
             <a:avLst/>
           </a:prstGeom>
-          <a:extLst>
-            <a:ext uri="{C572A759-6A51-4108-AA02-DFA0A04FC94B}">
-              <ma14:wrappingTextBoxFlag xmlns:ma14="http://schemas.microsoft.com/office/mac/drawingml/2011/main" val="0"/>
-            </a:ext>
-          </a:extLst>
         </p:spPr>
         <p:txBody>
           <a:bodyPr/>
@@ -1177,8 +1141,7 @@
           <a:p>
             <a:pPr algn="l"/>
             <a:fld id="{F7021451-1387-4CA6-816F-3879F97B5CBC}" type="slidenum">
-              <a:rPr b="0" lang="en-US"/>
-              <a:t>1003</a:t>
+              <a:rPr lang="en-US" b="0"/>
             </a:fld>
             <a:endParaRPr lang="en-US"/>
           </a:p>
@@ -1200,6 +1163,7 @@
         <a:solidFill>
           <a:srgbClr val="6C5CE7"/>
         </a:solidFill>
+        <a:effectLst/>
       </p:bgPr>
     </p:bg>
     <p:spTree>
@@ -1221,7 +1185,7 @@
           <p:cNvPr id="2" name="Text 0"/>
           <p:cNvSpPr/>
           <p:nvPr>
-            <p:ph idx="100" type="title" hasCustomPrompt="1"/>
+            <p:ph type="title" idx="100" hasCustomPrompt="1"/>
           </p:nvPr>
         </p:nvSpPr>
         <p:spPr>
@@ -1233,12 +1197,11 @@
             <a:avLst/>
           </a:prstGeom>
           <a:noFill/>
-          <a:ln/>
         </p:spPr>
         <p:txBody>
           <a:bodyPr wrap="square" rtlCol="0"/>
           <a:lstStyle>
-            <a:lvl1pPr algn="l" indent="0" marL="0">
+            <a:lvl1pPr marL="0" indent="0" algn="l">
               <a:buNone/>
               <a:defRPr lang="en-US" sz="4000" b="1" dirty="0">
                 <a:solidFill>
@@ -1248,7 +1211,7 @@
             </a:lvl1pPr>
           </a:lstStyle>
           <a:p>
-            <a:pPr algn="l" indent="0" marL="0">
+            <a:pPr marL="0" indent="0" algn="l">
               <a:buNone/>
             </a:pPr>
             <a:endParaRPr lang="en-US" sz="4000" dirty="0"/>
@@ -1260,7 +1223,7 @@
           <p:cNvPr id="3" name="Text 0"/>
           <p:cNvSpPr/>
           <p:nvPr>
-            <p:ph idx="101" type="body" hasCustomPrompt="1"/>
+            <p:ph type="body" idx="101" hasCustomPrompt="1"/>
           </p:nvPr>
         </p:nvSpPr>
         <p:spPr>
@@ -1272,12 +1235,11 @@
             <a:avLst/>
           </a:prstGeom>
           <a:noFill/>
-          <a:ln/>
         </p:spPr>
         <p:txBody>
           <a:bodyPr wrap="square" rtlCol="0"/>
           <a:lstStyle>
-            <a:lvl1pPr algn="l" indent="0" marL="0">
+            <a:lvl1pPr marL="0" indent="0" algn="l">
               <a:buNone/>
               <a:defRPr lang="en-US" sz="1800" dirty="0">
                 <a:solidFill>
@@ -1287,7 +1249,7 @@
             </a:lvl1pPr>
           </a:lstStyle>
           <a:p>
-            <a:pPr algn="l" indent="0" marL="0">
+            <a:pPr marL="0" indent="0" algn="l">
               <a:buNone/>
             </a:pPr>
             <a:endParaRPr lang="en-US" sz="1800" dirty="0"/>
@@ -1305,6 +1267,11 @@
 <file path=ppt/slideMasters/slideMaster1.xml><?xml version="1.0" encoding="utf-8"?>
 <p:sldMaster xmlns:a="http://schemas.openxmlformats.org/drawingml/2006/main" xmlns:r="http://schemas.openxmlformats.org/officeDocument/2006/relationships" xmlns:p="http://schemas.openxmlformats.org/presentationml/2006/main">
   <p:cSld>
+    <p:bg>
+      <p:bgRef idx="1001">
+        <a:schemeClr val="bg1"/>
+      </p:bgRef>
+    </p:bg>
     <p:spTree>
       <p:nvGrpSpPr>
         <p:cNvPr id="1" name=""/>
@@ -1337,11 +1304,6 @@
           <a:prstGeom prst="rect">
             <a:avLst/>
           </a:prstGeom>
-          <a:extLst>
-            <a:ext uri="{C572A759-6A51-4108-AA02-DFA0A04FC94B}">
-              <ma14:wrappingTextBoxFlag xmlns:ma14="http://schemas.microsoft.com/office/mac/drawingml/2011/main" val="0"/>
-            </a:ext>
-          </a:extLst>
         </p:spPr>
         <p:txBody>
           <a:bodyPr/>
@@ -1357,8 +1319,7 @@
           <a:p>
             <a:pPr algn="l"/>
             <a:fld id="{F7021451-1387-4CA6-816F-3879F97B5CBC}" type="slidenum">
-              <a:rPr b="0" lang="en-US"/>
-              <a:t>null</a:t>
+              <a:rPr lang="en-US" b="0"/>
             </a:fld>
             <a:endParaRPr lang="en-US"/>
           </a:p>
@@ -1396,7 +1357,7 @@
         <a:spcBef>
           <a:spcPct val="20000"/>
         </a:spcBef>
-        <a:buFont typeface="Arial" pitchFamily="34" charset="0"/>
+        <a:buFont typeface="Arial" panose="020B0604020202020204" pitchFamily="34" charset="0"/>
         <a:buChar char="•"/>
         <a:defRPr sz="3200" kern="1200">
           <a:solidFill>
@@ -1411,7 +1372,7 @@
         <a:spcBef>
           <a:spcPct val="20000"/>
         </a:spcBef>
-        <a:buFont typeface="Arial" pitchFamily="34" charset="0"/>
+        <a:buFont typeface="Arial" panose="020B0604020202020204" pitchFamily="34" charset="0"/>
         <a:buChar char="–"/>
         <a:defRPr sz="2800" kern="1200">
           <a:solidFill>
@@ -1426,7 +1387,7 @@
         <a:spcBef>
           <a:spcPct val="20000"/>
         </a:spcBef>
-        <a:buFont typeface="Arial" pitchFamily="34" charset="0"/>
+        <a:buFont typeface="Arial" panose="020B0604020202020204" pitchFamily="34" charset="0"/>
         <a:buChar char="•"/>
         <a:defRPr sz="2400" kern="1200">
           <a:solidFill>
@@ -1441,7 +1402,7 @@
         <a:spcBef>
           <a:spcPct val="20000"/>
         </a:spcBef>
-        <a:buFont typeface="Arial" pitchFamily="34" charset="0"/>
+        <a:buFont typeface="Arial" panose="020B0604020202020204" pitchFamily="34" charset="0"/>
         <a:buChar char="–"/>
         <a:defRPr sz="2000" kern="1200">
           <a:solidFill>
@@ -1456,7 +1417,7 @@
         <a:spcBef>
           <a:spcPct val="20000"/>
         </a:spcBef>
-        <a:buFont typeface="Arial" pitchFamily="34" charset="0"/>
+        <a:buFont typeface="Arial" panose="020B0604020202020204" pitchFamily="34" charset="0"/>
         <a:buChar char="»"/>
         <a:defRPr sz="2000" kern="1200">
           <a:solidFill>
@@ -1471,7 +1432,7 @@
         <a:spcBef>
           <a:spcPct val="20000"/>
         </a:spcBef>
-        <a:buFont typeface="Arial" pitchFamily="34" charset="0"/>
+        <a:buFont typeface="Arial" panose="020B0604020202020204" pitchFamily="34" charset="0"/>
         <a:buChar char="•"/>
         <a:defRPr sz="2000" kern="1200">
           <a:solidFill>
@@ -1486,7 +1447,7 @@
         <a:spcBef>
           <a:spcPct val="20000"/>
         </a:spcBef>
-        <a:buFont typeface="Arial" pitchFamily="34" charset="0"/>
+        <a:buFont typeface="Arial" panose="020B0604020202020204" pitchFamily="34" charset="0"/>
         <a:buChar char="•"/>
         <a:defRPr sz="2000" kern="1200">
           <a:solidFill>
@@ -1501,7 +1462,7 @@
         <a:spcBef>
           <a:spcPct val="20000"/>
         </a:spcBef>
-        <a:buFont typeface="Arial" pitchFamily="34" charset="0"/>
+        <a:buFont typeface="Arial" panose="020B0604020202020204" pitchFamily="34" charset="0"/>
         <a:buChar char="•"/>
         <a:defRPr sz="2000" kern="1200">
           <a:solidFill>
@@ -1516,7 +1477,7 @@
         <a:spcBef>
           <a:spcPct val="20000"/>
         </a:spcBef>
-        <a:buFont typeface="Arial" pitchFamily="34" charset="0"/>
+        <a:buFont typeface="Arial" panose="020B0604020202020204" pitchFamily="34" charset="0"/>
         <a:buChar char="•"/>
         <a:defRPr sz="2000" kern="1200">
           <a:solidFill>
@@ -1629,7 +1590,7 @@
 
 <file path=ppt/slides/slide1.xml><?xml version="1.0" encoding="utf-8"?>
 <p:sld xmlns:a="http://schemas.openxmlformats.org/drawingml/2006/main" xmlns:r="http://schemas.openxmlformats.org/officeDocument/2006/relationships" xmlns:p="http://schemas.openxmlformats.org/presentationml/2006/main">
-  <p:cSld name="Slide 1">
+  <p:cSld>
     <p:spTree>
       <p:nvGrpSpPr>
         <p:cNvPr id="1" name=""/>
@@ -1717,17 +1678,16 @@
             <a:avLst/>
           </a:prstGeom>
           <a:noFill/>
-          <a:ln/>
         </p:spPr>
         <p:txBody>
           <a:bodyPr wrap="square" lIns="0" tIns="0" rIns="0" bIns="0" rtlCol="0" anchor="t"/>
           <a:lstStyle/>
           <a:p>
-            <a:pPr indent="0" marL="0">
-              <a:buNone/>
-            </a:pPr>
-            <a:r>
-              <a:rPr lang="en-US" sz="1400" b="1" spc="400" kern="0" dirty="0">
+            <a:pPr marL="0" indent="0">
+              <a:buNone/>
+            </a:pPr>
+            <a:r>
+              <a:rPr lang="en-US" sz="1400" b="1" kern="0" spc="400" dirty="0">
                 <a:solidFill>
                   <a:srgbClr val="22B8CF"/>
                 </a:solidFill>
@@ -1753,13 +1713,12 @@
             <a:avLst/>
           </a:prstGeom>
           <a:noFill/>
-          <a:ln/>
         </p:spPr>
         <p:txBody>
           <a:bodyPr wrap="square" lIns="0" tIns="0" rIns="0" bIns="0" rtlCol="0" anchor="t"/>
           <a:lstStyle/>
           <a:p>
-            <a:pPr indent="0" marL="0">
+            <a:pPr marL="0" indent="0">
               <a:buNone/>
             </a:pPr>
             <a:r>
@@ -1767,9 +1726,9 @@
                 <a:solidFill>
                   <a:srgbClr val="FFFFFF"/>
                 </a:solidFill>
-                <a:latin typeface="Cambria" pitchFamily="34" charset="0"/>
-                <a:ea typeface="Cambria" pitchFamily="34" charset="-122"/>
-                <a:cs typeface="Cambria" pitchFamily="34" charset="-120"/>
+                <a:latin typeface="Cambria" panose="02040503050406030204" pitchFamily="34" charset="0"/>
+                <a:ea typeface="Cambria" panose="02040503050406030204" pitchFamily="34" charset="-122"/>
+                <a:cs typeface="Cambria" panose="02040503050406030204" pitchFamily="34" charset="-120"/>
               </a:rPr>
               <a:t>A user story in. Reviewed, repository-ready code out. In minutes.</a:t>
             </a:r>
@@ -1792,13 +1751,12 @@
             <a:avLst/>
           </a:prstGeom>
           <a:noFill/>
-          <a:ln/>
         </p:spPr>
         <p:txBody>
           <a:bodyPr wrap="square" lIns="0" tIns="0" rIns="0" bIns="0" rtlCol="0" anchor="t"/>
           <a:lstStyle/>
           <a:p>
-            <a:pPr indent="0" marL="0">
+            <a:pPr marL="0" indent="0">
               <a:buNone/>
             </a:pPr>
             <a:r>
@@ -1855,13 +1813,12 @@
             <a:avLst/>
           </a:prstGeom>
           <a:noFill/>
-          <a:ln/>
         </p:spPr>
         <p:txBody>
           <a:bodyPr wrap="square" lIns="0" tIns="0" rIns="0" bIns="0" rtlCol="0" anchor="t"/>
           <a:lstStyle/>
           <a:p>
-            <a:pPr indent="0" marL="0">
+            <a:pPr marL="0" indent="0">
               <a:buNone/>
             </a:pPr>
             <a:r>
@@ -1891,13 +1848,12 @@
             <a:avLst/>
           </a:prstGeom>
           <a:noFill/>
-          <a:ln/>
         </p:spPr>
         <p:txBody>
           <a:bodyPr wrap="square" lIns="0" tIns="0" rIns="0" bIns="0" rtlCol="0" anchor="t"/>
           <a:lstStyle/>
           <a:p>
-            <a:pPr indent="0" marL="0">
+            <a:pPr marL="0" indent="0">
               <a:buNone/>
             </a:pPr>
             <a:r>
@@ -1978,13 +1934,12 @@
             <a:avLst/>
           </a:prstGeom>
           <a:noFill/>
-          <a:ln/>
         </p:spPr>
         <p:txBody>
           <a:bodyPr wrap="square" lIns="0" tIns="0" rIns="0" bIns="0" rtlCol="0" anchor="t"/>
           <a:lstStyle/>
           <a:p>
-            <a:pPr indent="0" marL="0">
+            <a:pPr marL="0" indent="0">
               <a:buNone/>
             </a:pPr>
             <a:r>
@@ -2014,13 +1969,12 @@
             <a:avLst/>
           </a:prstGeom>
           <a:noFill/>
-          <a:ln/>
         </p:spPr>
         <p:txBody>
           <a:bodyPr wrap="square" lIns="0" tIns="0" rIns="0" bIns="0" rtlCol="0" anchor="t"/>
           <a:lstStyle/>
           <a:p>
-            <a:pPr indent="0" marL="0">
+            <a:pPr marL="0" indent="0">
               <a:buNone/>
             </a:pPr>
             <a:r>
@@ -2101,13 +2055,12 @@
             <a:avLst/>
           </a:prstGeom>
           <a:noFill/>
-          <a:ln/>
         </p:spPr>
         <p:txBody>
           <a:bodyPr wrap="square" lIns="0" tIns="0" rIns="0" bIns="0" rtlCol="0" anchor="t"/>
           <a:lstStyle/>
           <a:p>
-            <a:pPr indent="0" marL="0">
+            <a:pPr marL="0" indent="0">
               <a:buNone/>
             </a:pPr>
             <a:r>
@@ -2137,13 +2090,12 @@
             <a:avLst/>
           </a:prstGeom>
           <a:noFill/>
-          <a:ln/>
         </p:spPr>
         <p:txBody>
           <a:bodyPr wrap="square" lIns="0" tIns="0" rIns="0" bIns="0" rtlCol="0" anchor="t"/>
           <a:lstStyle/>
           <a:p>
-            <a:pPr indent="0" marL="0">
+            <a:pPr marL="0" indent="0">
               <a:buNone/>
             </a:pPr>
             <a:r>
@@ -2224,13 +2176,12 @@
             <a:avLst/>
           </a:prstGeom>
           <a:noFill/>
-          <a:ln/>
         </p:spPr>
         <p:txBody>
           <a:bodyPr wrap="square" lIns="0" tIns="0" rIns="0" bIns="0" rtlCol="0" anchor="t"/>
           <a:lstStyle/>
           <a:p>
-            <a:pPr indent="0" marL="0">
+            <a:pPr marL="0" indent="0">
               <a:buNone/>
             </a:pPr>
             <a:r>
@@ -2260,13 +2211,12 @@
             <a:avLst/>
           </a:prstGeom>
           <a:noFill/>
-          <a:ln/>
         </p:spPr>
         <p:txBody>
           <a:bodyPr wrap="square" lIns="0" tIns="0" rIns="0" bIns="0" rtlCol="0" anchor="t"/>
           <a:lstStyle/>
           <a:p>
-            <a:pPr indent="0" marL="0">
+            <a:pPr marL="0" indent="0">
               <a:buNone/>
             </a:pPr>
             <a:r>
@@ -2296,13 +2246,12 @@
             <a:avLst/>
           </a:prstGeom>
           <a:noFill/>
-          <a:ln/>
         </p:spPr>
         <p:txBody>
           <a:bodyPr wrap="square" lIns="0" tIns="0" rIns="0" bIns="0" rtlCol="0" anchor="t"/>
           <a:lstStyle/>
           <a:p>
-            <a:pPr indent="0" marL="0">
+            <a:pPr marL="0" indent="0">
               <a:buNone/>
             </a:pPr>
             <a:r>
@@ -2314,66 +2263,6 @@
               <a:t>Nothing leaves the bank except prompts to Azure OpenAI. No key, token or password is ever written to disk.</a:t>
             </a:r>
             <a:endParaRPr lang="en-US" sz="1200" dirty="0"/>
-          </a:p>
-        </p:txBody>
-      </p:sp>
-      <p:sp>
-        <p:nvSpPr>
-          <p:cNvPr id="24" name="Text 0"/>
-          <p:cNvSpPr/>
-          <p:nvPr>
-            <p:ph idx="100" type="title" hasCustomPrompt="1"/>
-          </p:nvPr>
-        </p:nvSpPr>
-        <p:spPr>
-          <a:xfrm>
-            <a:off x="640080" y="2103120"/>
-            <a:ext cx="10881360" cy="1371600"/>
-          </a:xfrm>
-          <a:prstGeom prst="rect">
-            <a:avLst/>
-          </a:prstGeom>
-          <a:noFill/>
-          <a:ln/>
-        </p:spPr>
-        <p:txBody>
-          <a:bodyPr wrap="square" lIns="0" tIns="0" rIns="0" bIns="0" rtlCol="0"/>
-          <a:lstStyle/>
-          <a:p>
-            <a:pPr algn="l" indent="0" marL="0">
-              <a:buNone/>
-            </a:pPr>
-            <a:endParaRPr lang="en-US" sz="4200" dirty="0"/>
-          </a:p>
-        </p:txBody>
-      </p:sp>
-      <p:sp>
-        <p:nvSpPr>
-          <p:cNvPr id="25" name="Text 0"/>
-          <p:cNvSpPr/>
-          <p:nvPr>
-            <p:ph idx="101" type="body" hasCustomPrompt="1"/>
-          </p:nvPr>
-        </p:nvSpPr>
-        <p:spPr>
-          <a:xfrm>
-            <a:off x="640080" y="3566160"/>
-            <a:ext cx="10881360" cy="1463040"/>
-          </a:xfrm>
-          <a:prstGeom prst="rect">
-            <a:avLst/>
-          </a:prstGeom>
-          <a:noFill/>
-          <a:ln/>
-        </p:spPr>
-        <p:txBody>
-          <a:bodyPr wrap="square" lIns="0" tIns="0" rIns="0" bIns="0" rtlCol="0"/>
-          <a:lstStyle/>
-          <a:p>
-            <a:pPr algn="l" indent="0" marL="0">
-              <a:buNone/>
-            </a:pPr>
-            <a:endParaRPr lang="en-US" sz="2000" dirty="0"/>
           </a:p>
         </p:txBody>
       </p:sp>
@@ -2387,7 +2276,498 @@
 
 <file path=ppt/slides/slide2.xml><?xml version="1.0" encoding="utf-8"?>
 <p:sld xmlns:a="http://schemas.openxmlformats.org/drawingml/2006/main" xmlns:r="http://schemas.openxmlformats.org/officeDocument/2006/relationships" xmlns:p="http://schemas.openxmlformats.org/presentationml/2006/main">
-  <p:cSld name="Slide 2">
+  <p:cSld>
+    <p:spTree>
+      <p:nvGrpSpPr>
+        <p:cNvPr id="1" name=""/>
+        <p:cNvGrpSpPr/>
+        <p:nvPr/>
+      </p:nvGrpSpPr>
+      <p:grpSpPr/>
+      <p:sp>
+        <p:nvSpPr>
+          <p:cNvPr id="2" name="Title 1"/>
+          <p:cNvSpPr>
+            <a:spLocks noGrp="1"/>
+          </p:cNvSpPr>
+          <p:nvPr>
+            <p:ph type="title" idx="100"/>
+          </p:nvPr>
+        </p:nvSpPr>
+        <p:spPr/>
+        <p:txBody>
+          <a:bodyPr/>
+          <a:lstStyle/>
+          <a:p>
+            <a:r>
+              <a:rPr sz="3000" b="1">
+                <a:solidFill>
+                  <a:srgbClr val="1B1F3B"/>
+                </a:solidFill>
+              </a:rPr>
+              <a:t>Why, for whom, what changes – on one page</a:t>
+            </a:r>
+            <a:endParaRPr sz="3000" b="1">
+              <a:solidFill>
+                <a:srgbClr val="1B1F3B"/>
+              </a:solidFill>
+            </a:endParaRPr>
+          </a:p>
+        </p:txBody>
+      </p:sp>
+      <p:graphicFrame>
+        <p:nvGraphicFramePr>
+          <p:cNvPr id="3" name="Table 2"/>
+          <p:cNvGraphicFramePr>
+            <a:graphicFrameLocks noGrp="1"/>
+          </p:cNvGraphicFramePr>
+          <p:nvPr/>
+        </p:nvGraphicFramePr>
+        <p:xfrm>
+          <a:off x="640080" y="1371600"/>
+          <a:ext cx="10972800" cy="4571994"/>
+        </p:xfrm>
+        <a:graphic>
+          <a:graphicData uri="http://schemas.openxmlformats.org/drawingml/2006/table">
+            <a:tbl>
+              <a:tblPr>
+                <a:tableStyleId>{5C22544A-7EE6-4342-B048-85BDC9FD1C3A}</a:tableStyleId>
+              </a:tblPr>
+              <a:tblGrid>
+                <a:gridCol w="1920240"/>
+                <a:gridCol w="9052560"/>
+              </a:tblGrid>
+              <a:tr h="653142">
+                <a:tc>
+                  <a:txBody>
+                    <a:bodyPr/>
+                    <a:lstStyle/>
+                    <a:p>
+                      <a:r>
+                        <a:rPr sz="1400" b="1">
+                          <a:solidFill>
+                            <a:srgbClr val="6C5CE7"/>
+                          </a:solidFill>
+                        </a:rPr>
+                        <a:t>The problem</a:t>
+                      </a:r>
+                      <a:endParaRPr sz="1400" b="1">
+                        <a:solidFill>
+                          <a:srgbClr val="6C5CE7"/>
+                        </a:solidFill>
+                      </a:endParaRPr>
+                    </a:p>
+                  </a:txBody>
+                  <a:tcPr marL="137160" marR="137160" anchor="ctr">
+                    <a:solidFill>
+                      <a:srgbClr val="F1F2F8"/>
+                    </a:solidFill>
+                  </a:tcPr>
+                </a:tc>
+                <a:tc>
+                  <a:txBody>
+                    <a:bodyPr/>
+                    <a:lstStyle/>
+                    <a:p>
+                      <a:r>
+                        <a:rPr sz="1250">
+                          <a:solidFill>
+                            <a:srgbClr val="1B1F3B"/>
+                          </a:solidFill>
+                        </a:rPr>
+                        <a:t>Most of the time on a story goes into finding out how our code wants things done (which folder, which file to copy, where to register, which grant to add) – not into the logic itself. Misses show up late, in review or production.</a:t>
+                      </a:r>
+                      <a:endParaRPr sz="1250">
+                        <a:solidFill>
+                          <a:srgbClr val="1B1F3B"/>
+                        </a:solidFill>
+                      </a:endParaRPr>
+                    </a:p>
+                  </a:txBody>
+                  <a:tcPr marL="137160" marR="137160" anchor="ctr">
+                    <a:solidFill>
+                      <a:srgbClr val="F1F2F8"/>
+                    </a:solidFill>
+                  </a:tcPr>
+                </a:tc>
+              </a:tr>
+              <a:tr h="653142">
+                <a:tc>
+                  <a:txBody>
+                    <a:bodyPr/>
+                    <a:lstStyle/>
+                    <a:p>
+                      <a:r>
+                        <a:rPr sz="1400" b="1">
+                          <a:solidFill>
+                            <a:srgbClr val="6C5CE7"/>
+                          </a:solidFill>
+                        </a:rPr>
+                        <a:t>Who it is for</a:t>
+                      </a:r>
+                      <a:endParaRPr sz="1400" b="1">
+                        <a:solidFill>
+                          <a:srgbClr val="6C5CE7"/>
+                        </a:solidFill>
+                      </a:endParaRPr>
+                    </a:p>
+                  </a:txBody>
+                  <a:tcPr marL="137160" marR="137160" anchor="ctr">
+                    <a:solidFill>
+                      <a:srgbClr val="FFFFFF"/>
+                    </a:solidFill>
+                  </a:tcPr>
+                </a:tc>
+                <a:tc>
+                  <a:txBody>
+                    <a:bodyPr/>
+                    <a:lstStyle/>
+                    <a:p>
+                      <a:r>
+                        <a:rPr sz="1250">
+                          <a:solidFill>
+                            <a:srgbClr val="1B1F3B"/>
+                          </a:solidFill>
+                        </a:rPr>
+                        <a:t>The developers who build IKG, ODM and NLG; then reviewers, new joiners, story writers and the people responsible for standards.</a:t>
+                      </a:r>
+                      <a:endParaRPr sz="1250">
+                        <a:solidFill>
+                          <a:srgbClr val="1B1F3B"/>
+                        </a:solidFill>
+                      </a:endParaRPr>
+                    </a:p>
+                  </a:txBody>
+                  <a:tcPr marL="137160" marR="137160" anchor="ctr">
+                    <a:solidFill>
+                      <a:srgbClr val="FFFFFF"/>
+                    </a:solidFill>
+                  </a:tcPr>
+                </a:tc>
+              </a:tr>
+              <a:tr h="653142">
+                <a:tc>
+                  <a:txBody>
+                    <a:bodyPr/>
+                    <a:lstStyle/>
+                    <a:p>
+                      <a:r>
+                        <a:rPr sz="1400" b="1">
+                          <a:solidFill>
+                            <a:srgbClr val="6C5CE7"/>
+                          </a:solidFill>
+                        </a:rPr>
+                        <a:t>What we built</a:t>
+                      </a:r>
+                      <a:endParaRPr sz="1400" b="1">
+                        <a:solidFill>
+                          <a:srgbClr val="6C5CE7"/>
+                        </a:solidFill>
+                      </a:endParaRPr>
+                    </a:p>
+                  </a:txBody>
+                  <a:tcPr marL="137160" marR="137160" anchor="ctr">
+                    <a:solidFill>
+                      <a:srgbClr val="F1F2F8"/>
+                    </a:solidFill>
+                  </a:tcPr>
+                </a:tc>
+                <a:tc>
+                  <a:txBody>
+                    <a:bodyPr/>
+                    <a:lstStyle/>
+                    <a:p>
+                      <a:r>
+                        <a:rPr sz="1250">
+                          <a:solidFill>
+                            <a:srgbClr val="1B1F3B"/>
+                          </a:solidFill>
+                        </a:rPr>
+                        <a:t>Knowledge Pack: a context pack with the folders, files, tables, rules and conventions of each system. Dev Assistant: a tool where you attach a story, press Run, and get the plan, the files, a check report and a review – then push it to GitLab under your own name.</a:t>
+                      </a:r>
+                      <a:endParaRPr sz="1250">
+                        <a:solidFill>
+                          <a:srgbClr val="1B1F3B"/>
+                        </a:solidFill>
+                      </a:endParaRPr>
+                    </a:p>
+                  </a:txBody>
+                  <a:tcPr marL="137160" marR="137160" anchor="ctr">
+                    <a:solidFill>
+                      <a:srgbClr val="F1F2F8"/>
+                    </a:solidFill>
+                  </a:tcPr>
+                </a:tc>
+              </a:tr>
+              <a:tr h="653142">
+                <a:tc>
+                  <a:txBody>
+                    <a:bodyPr/>
+                    <a:lstStyle/>
+                    <a:p>
+                      <a:r>
+                        <a:rPr sz="1400" b="1">
+                          <a:solidFill>
+                            <a:srgbClr val="6C5CE7"/>
+                          </a:solidFill>
+                        </a:rPr>
+                        <a:t>What changes</a:t>
+                      </a:r>
+                      <a:endParaRPr sz="1400" b="1">
+                        <a:solidFill>
+                          <a:srgbClr val="6C5CE7"/>
+                        </a:solidFill>
+                      </a:endParaRPr>
+                    </a:p>
+                  </a:txBody>
+                  <a:tcPr marL="137160" marR="137160" anchor="ctr">
+                    <a:solidFill>
+                      <a:srgbClr val="FFFFFF"/>
+                    </a:solidFill>
+                  </a:tcPr>
+                </a:tc>
+                <a:tc>
+                  <a:txBody>
+                    <a:bodyPr/>
+                    <a:lstStyle/>
+                    <a:p>
+                      <a:r>
+                        <a:rPr sz="1250">
+                          <a:solidFill>
+                            <a:srgbClr val="1B1F3B"/>
+                          </a:solidFill>
+                        </a:rPr>
+                        <a:t>A routine story goes from 2–4 days to the same day. Mechanical mistakes are caught before the code is sent for review. Standards are checked on every file, every time. The knowledge stays current and does not leave with people.</a:t>
+                      </a:r>
+                      <a:endParaRPr sz="1250">
+                        <a:solidFill>
+                          <a:srgbClr val="1B1F3B"/>
+                        </a:solidFill>
+                      </a:endParaRPr>
+                    </a:p>
+                  </a:txBody>
+                  <a:tcPr marL="137160" marR="137160" anchor="ctr">
+                    <a:solidFill>
+                      <a:srgbClr val="FFFFFF"/>
+                    </a:solidFill>
+                  </a:tcPr>
+                </a:tc>
+              </a:tr>
+              <a:tr h="653142">
+                <a:tc>
+                  <a:txBody>
+                    <a:bodyPr/>
+                    <a:lstStyle/>
+                    <a:p>
+                      <a:r>
+                        <a:rPr sz="1400" b="1">
+                          <a:solidFill>
+                            <a:srgbClr val="6C5CE7"/>
+                          </a:solidFill>
+                        </a:rPr>
+                        <a:t>Proof so far</a:t>
+                      </a:r>
+                      <a:endParaRPr sz="1400" b="1">
+                        <a:solidFill>
+                          <a:srgbClr val="6C5CE7"/>
+                        </a:solidFill>
+                      </a:endParaRPr>
+                    </a:p>
+                  </a:txBody>
+                  <a:tcPr marL="137160" marR="137160" anchor="ctr">
+                    <a:solidFill>
+                      <a:srgbClr val="F1F2F8"/>
+                    </a:solidFill>
+                  </a:tcPr>
+                </a:tc>
+                <a:tc>
+                  <a:txBody>
+                    <a:bodyPr/>
+                    <a:lstStyle/>
+                    <a:p>
+                      <a:r>
+                        <a:rPr sz="1250">
+                          <a:solidFill>
+                            <a:srgbClr val="1B1F3B"/>
+                          </a:solidFill>
+                        </a:rPr>
+                        <a:t>Two real stories: code files generated in a few minutes, for under USD 2 each in token usage, with the mechanical parts right and only business questions left open.</a:t>
+                      </a:r>
+                      <a:endParaRPr sz="1250">
+                        <a:solidFill>
+                          <a:srgbClr val="1B1F3B"/>
+                        </a:solidFill>
+                      </a:endParaRPr>
+                    </a:p>
+                  </a:txBody>
+                  <a:tcPr marL="137160" marR="137160" anchor="ctr">
+                    <a:solidFill>
+                      <a:srgbClr val="F1F2F8"/>
+                    </a:solidFill>
+                  </a:tcPr>
+                </a:tc>
+              </a:tr>
+              <a:tr h="653142">
+                <a:tc>
+                  <a:txBody>
+                    <a:bodyPr/>
+                    <a:lstStyle/>
+                    <a:p>
+                      <a:r>
+                        <a:rPr sz="1400" b="1">
+                          <a:solidFill>
+                            <a:srgbClr val="6C5CE7"/>
+                          </a:solidFill>
+                        </a:rPr>
+                        <a:t>Guardrails</a:t>
+                      </a:r>
+                      <a:endParaRPr sz="1400" b="1">
+                        <a:solidFill>
+                          <a:srgbClr val="6C5CE7"/>
+                        </a:solidFill>
+                      </a:endParaRPr>
+                    </a:p>
+                  </a:txBody>
+                  <a:tcPr marL="137160" marR="137160" anchor="ctr">
+                    <a:solidFill>
+                      <a:srgbClr val="FFFFFF"/>
+                    </a:solidFill>
+                  </a:tcPr>
+                </a:tc>
+                <a:tc>
+                  <a:txBody>
+                    <a:bodyPr/>
+                    <a:lstStyle/>
+                    <a:p>
+                      <a:r>
+                        <a:rPr sz="1250">
+                          <a:solidFill>
+                            <a:srgbClr val="1B1F3B"/>
+                          </a:solidFill>
+                        </a:rPr>
+                        <a:t>It never merges anything itself; it never rewrites your existing files blindly; it shows exactly which files, tables and rules it used; every branch and commit carries the developer's name; no secrets stored on disk.</a:t>
+                      </a:r>
+                      <a:endParaRPr sz="1250">
+                        <a:solidFill>
+                          <a:srgbClr val="1B1F3B"/>
+                        </a:solidFill>
+                      </a:endParaRPr>
+                    </a:p>
+                  </a:txBody>
+                  <a:tcPr marL="137160" marR="137160" anchor="ctr">
+                    <a:solidFill>
+                      <a:srgbClr val="FFFFFF"/>
+                    </a:solidFill>
+                  </a:tcPr>
+                </a:tc>
+              </a:tr>
+              <a:tr h="653142">
+                <a:tc>
+                  <a:txBody>
+                    <a:bodyPr/>
+                    <a:lstStyle/>
+                    <a:p>
+                      <a:r>
+                        <a:rPr sz="1400" b="1">
+                          <a:solidFill>
+                            <a:srgbClr val="6C5CE7"/>
+                          </a:solidFill>
+                        </a:rPr>
+                        <a:t>What we ask</a:t>
+                      </a:r>
+                      <a:endParaRPr sz="1400" b="1">
+                        <a:solidFill>
+                          <a:srgbClr val="6C5CE7"/>
+                        </a:solidFill>
+                      </a:endParaRPr>
+                    </a:p>
+                  </a:txBody>
+                  <a:tcPr marL="137160" marR="137160" anchor="ctr">
+                    <a:solidFill>
+                      <a:srgbClr val="F1F2F8"/>
+                    </a:solidFill>
+                  </a:tcPr>
+                </a:tc>
+                <a:tc>
+                  <a:txBody>
+                    <a:bodyPr/>
+                    <a:lstStyle/>
+                    <a:p>
+                      <a:r>
+                        <a:rPr sz="1250">
+                          <a:solidFill>
+                            <a:srgbClr val="1B1F3B"/>
+                          </a:solidFill>
+                        </a:rPr>
+                        <a:t>Write stories that name the tables and columns; keep the knowledge file current; review the result the way you review any merge request.</a:t>
+                      </a:r>
+                      <a:endParaRPr sz="1250">
+                        <a:solidFill>
+                          <a:srgbClr val="1B1F3B"/>
+                        </a:solidFill>
+                      </a:endParaRPr>
+                    </a:p>
+                  </a:txBody>
+                  <a:tcPr marL="137160" marR="137160" anchor="ctr">
+                    <a:solidFill>
+                      <a:srgbClr val="F1F2F8"/>
+                    </a:solidFill>
+                  </a:tcPr>
+                </a:tc>
+              </a:tr>
+            </a:tbl>
+          </a:graphicData>
+        </a:graphic>
+      </p:graphicFrame>
+      <p:sp>
+        <p:nvSpPr>
+          <p:cNvPr id="4" name="TextBox 3"/>
+          <p:cNvSpPr txBox="1"/>
+          <p:nvPr/>
+        </p:nvSpPr>
+        <p:spPr>
+          <a:xfrm>
+            <a:off x="640080" y="6035040"/>
+            <a:ext cx="10972800" cy="365760"/>
+          </a:xfrm>
+          <a:prstGeom prst="rect">
+            <a:avLst/>
+          </a:prstGeom>
+          <a:noFill/>
+        </p:spPr>
+        <p:txBody>
+          <a:bodyPr wrap="square">
+            <a:spAutoFit/>
+          </a:bodyPr>
+          <a:lstStyle/>
+          <a:p>
+            <a:r>
+              <a:rPr sz="1250" i="1">
+                <a:solidFill>
+                  <a:srgbClr val="6C5CE7"/>
+                </a:solidFill>
+              </a:rPr>
+              <a:t>Days of convention-finding become minutes; the developer keeps the pen and the merge button.</a:t>
+            </a:r>
+            <a:endParaRPr sz="1250" i="1">
+              <a:solidFill>
+                <a:srgbClr val="6C5CE7"/>
+              </a:solidFill>
+            </a:endParaRPr>
+          </a:p>
+        </p:txBody>
+      </p:sp>
+    </p:spTree>
+  </p:cSld>
+  <p:clrMapOvr>
+    <a:masterClrMapping/>
+  </p:clrMapOvr>
+</p:sld>
+</file>
+
+<file path=ppt/slides/slide3.xml><?xml version="1.0" encoding="utf-8"?>
+<p:sld xmlns:a="http://schemas.openxmlformats.org/drawingml/2006/main" xmlns:r="http://schemas.openxmlformats.org/officeDocument/2006/relationships" xmlns:p="http://schemas.openxmlformats.org/presentationml/2006/main">
+  <p:cSld>
     <p:spTree>
       <p:nvGrpSpPr>
         <p:cNvPr id="1" name=""/>
@@ -2407,7 +2787,7 @@
           <p:cNvPr id="2" name="Text 0"/>
           <p:cNvSpPr/>
           <p:nvPr>
-            <p:ph idx="100" type="title" hasCustomPrompt="1"/>
+            <p:ph type="title" idx="100" hasCustomPrompt="1"/>
           </p:nvPr>
         </p:nvSpPr>
         <p:spPr>
@@ -2419,13 +2799,12 @@
             <a:avLst/>
           </a:prstGeom>
           <a:noFill/>
-          <a:ln/>
         </p:spPr>
         <p:txBody>
           <a:bodyPr wrap="square" lIns="0" tIns="0" rIns="0" bIns="0" rtlCol="0"/>
           <a:lstStyle/>
           <a:p>
-            <a:pPr algn="l" indent="0" marL="0">
+            <a:pPr marL="0" indent="0" algn="l">
               <a:buNone/>
             </a:pPr>
             <a:r>
@@ -2482,13 +2861,12 @@
             <a:avLst/>
           </a:prstGeom>
           <a:noFill/>
-          <a:ln/>
         </p:spPr>
         <p:txBody>
           <a:bodyPr wrap="square" lIns="0" tIns="0" rIns="0" bIns="0" rtlCol="0" anchor="t"/>
           <a:lstStyle/>
           <a:p>
-            <a:pPr indent="0" marL="0">
+            <a:pPr marL="0" indent="0">
               <a:buNone/>
             </a:pPr>
             <a:r>
@@ -2518,13 +2896,12 @@
             <a:avLst/>
           </a:prstGeom>
           <a:noFill/>
-          <a:ln/>
         </p:spPr>
         <p:txBody>
           <a:bodyPr wrap="square" lIns="0" tIns="0" rIns="0" bIns="0" rtlCol="0" anchor="t"/>
           <a:lstStyle/>
           <a:p>
-            <a:pPr indent="0" marL="0">
+            <a:pPr marL="0" indent="0">
               <a:buNone/>
             </a:pPr>
             <a:r>
@@ -2581,13 +2958,12 @@
             <a:avLst/>
           </a:prstGeom>
           <a:noFill/>
-          <a:ln/>
         </p:spPr>
         <p:txBody>
           <a:bodyPr wrap="square" lIns="0" tIns="0" rIns="0" bIns="0" rtlCol="0" anchor="t"/>
           <a:lstStyle/>
           <a:p>
-            <a:pPr indent="0" marL="0">
+            <a:pPr marL="0" indent="0">
               <a:buNone/>
             </a:pPr>
             <a:r>
@@ -2617,13 +2993,12 @@
             <a:avLst/>
           </a:prstGeom>
           <a:noFill/>
-          <a:ln/>
         </p:spPr>
         <p:txBody>
           <a:bodyPr wrap="square" lIns="0" tIns="0" rIns="0" bIns="0" rtlCol="0" anchor="t"/>
           <a:lstStyle/>
           <a:p>
-            <a:pPr indent="0" marL="0">
+            <a:pPr marL="0" indent="0">
               <a:buNone/>
             </a:pPr>
             <a:r>
@@ -2705,13 +3080,12 @@
             <a:avLst/>
           </a:prstGeom>
           <a:noFill/>
-          <a:ln/>
         </p:spPr>
         <p:txBody>
           <a:bodyPr wrap="square" lIns="0" tIns="0" rIns="0" bIns="0" rtlCol="0" anchor="ctr"/>
           <a:lstStyle/>
           <a:p>
-            <a:pPr algn="ctr" indent="0" marL="0">
+            <a:pPr marL="0" indent="0" algn="ctr">
               <a:buNone/>
             </a:pPr>
             <a:r>
@@ -2741,13 +3115,12 @@
             <a:avLst/>
           </a:prstGeom>
           <a:noFill/>
-          <a:ln/>
         </p:spPr>
         <p:txBody>
           <a:bodyPr wrap="square" lIns="0" tIns="0" rIns="0" bIns="0" rtlCol="0" anchor="ctr"/>
           <a:lstStyle/>
           <a:p>
-            <a:pPr indent="0" marL="0">
+            <a:pPr marL="0" indent="0">
               <a:buNone/>
             </a:pPr>
             <a:r>
@@ -2777,13 +3150,12 @@
             <a:avLst/>
           </a:prstGeom>
           <a:noFill/>
-          <a:ln/>
         </p:spPr>
         <p:txBody>
           <a:bodyPr wrap="square" lIns="0" tIns="0" rIns="0" bIns="0" rtlCol="0" anchor="t"/>
           <a:lstStyle/>
           <a:p>
-            <a:pPr indent="0" marL="0">
+            <a:pPr marL="0" indent="0">
               <a:buNone/>
             </a:pPr>
             <a:r>
@@ -2889,13 +3261,12 @@
             <a:avLst/>
           </a:prstGeom>
           <a:noFill/>
-          <a:ln/>
         </p:spPr>
         <p:txBody>
           <a:bodyPr wrap="square" lIns="0" tIns="0" rIns="0" bIns="0" rtlCol="0" anchor="ctr"/>
           <a:lstStyle/>
           <a:p>
-            <a:pPr algn="ctr" indent="0" marL="0">
+            <a:pPr marL="0" indent="0" algn="ctr">
               <a:buNone/>
             </a:pPr>
             <a:r>
@@ -2925,13 +3296,12 @@
             <a:avLst/>
           </a:prstGeom>
           <a:noFill/>
-          <a:ln/>
         </p:spPr>
         <p:txBody>
           <a:bodyPr wrap="square" lIns="0" tIns="0" rIns="0" bIns="0" rtlCol="0" anchor="ctr"/>
           <a:lstStyle/>
           <a:p>
-            <a:pPr indent="0" marL="0">
+            <a:pPr marL="0" indent="0">
               <a:buNone/>
             </a:pPr>
             <a:r>
@@ -2961,13 +3331,12 @@
             <a:avLst/>
           </a:prstGeom>
           <a:noFill/>
-          <a:ln/>
         </p:spPr>
         <p:txBody>
           <a:bodyPr wrap="square" lIns="0" tIns="0" rIns="0" bIns="0" rtlCol="0" anchor="t"/>
           <a:lstStyle/>
           <a:p>
-            <a:pPr indent="0" marL="0">
+            <a:pPr marL="0" indent="0">
               <a:buNone/>
             </a:pPr>
             <a:r>
@@ -3073,13 +3442,12 @@
             <a:avLst/>
           </a:prstGeom>
           <a:noFill/>
-          <a:ln/>
         </p:spPr>
         <p:txBody>
           <a:bodyPr wrap="square" lIns="0" tIns="0" rIns="0" bIns="0" rtlCol="0" anchor="ctr"/>
           <a:lstStyle/>
           <a:p>
-            <a:pPr algn="ctr" indent="0" marL="0">
+            <a:pPr marL="0" indent="0" algn="ctr">
               <a:buNone/>
             </a:pPr>
             <a:r>
@@ -3109,13 +3477,12 @@
             <a:avLst/>
           </a:prstGeom>
           <a:noFill/>
-          <a:ln/>
         </p:spPr>
         <p:txBody>
           <a:bodyPr wrap="square" lIns="0" tIns="0" rIns="0" bIns="0" rtlCol="0" anchor="ctr"/>
           <a:lstStyle/>
           <a:p>
-            <a:pPr indent="0" marL="0">
+            <a:pPr marL="0" indent="0">
               <a:buNone/>
             </a:pPr>
             <a:r>
@@ -3145,13 +3512,12 @@
             <a:avLst/>
           </a:prstGeom>
           <a:noFill/>
-          <a:ln/>
         </p:spPr>
         <p:txBody>
           <a:bodyPr wrap="square" lIns="0" tIns="0" rIns="0" bIns="0" rtlCol="0" anchor="t"/>
           <a:lstStyle/>
           <a:p>
-            <a:pPr indent="0" marL="0">
+            <a:pPr marL="0" indent="0">
               <a:buNone/>
             </a:pPr>
             <a:r>
@@ -3257,13 +3623,12 @@
             <a:avLst/>
           </a:prstGeom>
           <a:noFill/>
-          <a:ln/>
         </p:spPr>
         <p:txBody>
           <a:bodyPr wrap="square" lIns="0" tIns="0" rIns="0" bIns="0" rtlCol="0" anchor="ctr"/>
           <a:lstStyle/>
           <a:p>
-            <a:pPr algn="ctr" indent="0" marL="0">
+            <a:pPr marL="0" indent="0" algn="ctr">
               <a:buNone/>
             </a:pPr>
             <a:r>
@@ -3293,13 +3658,12 @@
             <a:avLst/>
           </a:prstGeom>
           <a:noFill/>
-          <a:ln/>
         </p:spPr>
         <p:txBody>
           <a:bodyPr wrap="square" lIns="0" tIns="0" rIns="0" bIns="0" rtlCol="0" anchor="ctr"/>
           <a:lstStyle/>
           <a:p>
-            <a:pPr indent="0" marL="0">
+            <a:pPr marL="0" indent="0">
               <a:buNone/>
             </a:pPr>
             <a:r>
@@ -3329,13 +3693,12 @@
             <a:avLst/>
           </a:prstGeom>
           <a:noFill/>
-          <a:ln/>
         </p:spPr>
         <p:txBody>
           <a:bodyPr wrap="square" lIns="0" tIns="0" rIns="0" bIns="0" rtlCol="0" anchor="t"/>
           <a:lstStyle/>
           <a:p>
-            <a:pPr indent="0" marL="0">
+            <a:pPr marL="0" indent="0">
               <a:buNone/>
             </a:pPr>
             <a:r>
@@ -3441,13 +3804,12 @@
             <a:avLst/>
           </a:prstGeom>
           <a:noFill/>
-          <a:ln/>
         </p:spPr>
         <p:txBody>
           <a:bodyPr wrap="square" lIns="0" tIns="0" rIns="0" bIns="0" rtlCol="0" anchor="ctr"/>
           <a:lstStyle/>
           <a:p>
-            <a:pPr algn="ctr" indent="0" marL="0">
+            <a:pPr marL="0" indent="0" algn="ctr">
               <a:buNone/>
             </a:pPr>
             <a:r>
@@ -3477,13 +3839,12 @@
             <a:avLst/>
           </a:prstGeom>
           <a:noFill/>
-          <a:ln/>
         </p:spPr>
         <p:txBody>
           <a:bodyPr wrap="square" lIns="0" tIns="0" rIns="0" bIns="0" rtlCol="0" anchor="ctr"/>
           <a:lstStyle/>
           <a:p>
-            <a:pPr indent="0" marL="0">
+            <a:pPr marL="0" indent="0">
               <a:buNone/>
             </a:pPr>
             <a:r>
@@ -3513,13 +3874,12 @@
             <a:avLst/>
           </a:prstGeom>
           <a:noFill/>
-          <a:ln/>
         </p:spPr>
         <p:txBody>
           <a:bodyPr wrap="square" lIns="0" tIns="0" rIns="0" bIns="0" rtlCol="0" anchor="t"/>
           <a:lstStyle/>
           <a:p>
-            <a:pPr indent="0" marL="0">
+            <a:pPr marL="0" indent="0">
               <a:buNone/>
             </a:pPr>
             <a:r>
@@ -3549,13 +3909,12 @@
             <a:avLst/>
           </a:prstGeom>
           <a:noFill/>
-          <a:ln/>
         </p:spPr>
         <p:txBody>
           <a:bodyPr wrap="square" lIns="0" tIns="0" rIns="0" bIns="0" rtlCol="0" anchor="t"/>
           <a:lstStyle/>
           <a:p>
-            <a:pPr indent="0" marL="0">
+            <a:pPr marL="0" indent="0">
               <a:buNone/>
             </a:pPr>
             <a:r>
@@ -3572,7 +3931,7 @@
       </p:sp>
       <p:sp>
         <p:nvSpPr>
-          <p:cNvPr id="25" name="Slide Number Placeholder 0"/>
+          <p:cNvPr id="39" name="Slide Number Placeholder 0"/>
           <p:cNvSpPr>
             <a:spLocks noGrp="1"/>
           </p:cNvSpPr>
@@ -3588,11 +3947,6 @@
           <a:prstGeom prst="rect">
             <a:avLst/>
           </a:prstGeom>
-          <a:extLst>
-            <a:ext uri="{C572A759-6A51-4108-AA02-DFA0A04FC94B}">
-              <ma14:wrappingTextBoxFlag xmlns:ma14="http://schemas.microsoft.com/office/mac/drawingml/2011/main" val="0"/>
-            </a:ext>
-          </a:extLst>
         </p:spPr>
         <p:txBody>
           <a:bodyPr/>
@@ -3608,8 +3962,7 @@
           <a:p>
             <a:pPr algn="l"/>
             <a:fld id="{F7021451-1387-4CA6-816F-3879F97B5CBC}" type="slidenum">
-              <a:rPr b="0" lang="en-US"/>
-              <a:t>2</a:t>
+              <a:rPr lang="en-US" b="0"/>
             </a:fld>
             <a:endParaRPr lang="en-US"/>
           </a:p>
@@ -3623,9 +3976,9 @@
 </p:sld>
 </file>
 
-<file path=ppt/slides/slide3.xml><?xml version="1.0" encoding="utf-8"?>
+<file path=ppt/slides/slide4.xml><?xml version="1.0" encoding="utf-8"?>
 <p:sld xmlns:a="http://schemas.openxmlformats.org/drawingml/2006/main" xmlns:r="http://schemas.openxmlformats.org/officeDocument/2006/relationships" xmlns:p="http://schemas.openxmlformats.org/presentationml/2006/main">
-  <p:cSld name="Slide 3">
+  <p:cSld>
     <p:spTree>
       <p:nvGrpSpPr>
         <p:cNvPr id="1" name=""/>
@@ -3645,7 +3998,7 @@
           <p:cNvPr id="2" name="Text 0"/>
           <p:cNvSpPr/>
           <p:nvPr>
-            <p:ph idx="100" type="title" hasCustomPrompt="1"/>
+            <p:ph type="title" idx="100" hasCustomPrompt="1"/>
           </p:nvPr>
         </p:nvSpPr>
         <p:spPr>
@@ -3657,13 +4010,12 @@
             <a:avLst/>
           </a:prstGeom>
           <a:noFill/>
-          <a:ln/>
         </p:spPr>
         <p:txBody>
           <a:bodyPr wrap="square" lIns="0" tIns="0" rIns="0" bIns="0" rtlCol="0"/>
           <a:lstStyle/>
           <a:p>
-            <a:pPr algn="l" indent="0" marL="0">
+            <a:pPr marL="0" indent="0" algn="l">
               <a:buNone/>
             </a:pPr>
             <a:r>
@@ -3720,13 +4072,12 @@
             <a:avLst/>
           </a:prstGeom>
           <a:noFill/>
-          <a:ln/>
         </p:spPr>
         <p:txBody>
           <a:bodyPr wrap="square" lIns="0" tIns="0" rIns="0" bIns="0" rtlCol="0" anchor="t"/>
           <a:lstStyle/>
           <a:p>
-            <a:pPr indent="0" marL="0">
+            <a:pPr marL="0" indent="0">
               <a:buNone/>
             </a:pPr>
             <a:r>
@@ -3756,13 +4107,12 @@
             <a:avLst/>
           </a:prstGeom>
           <a:noFill/>
-          <a:ln/>
         </p:spPr>
         <p:txBody>
           <a:bodyPr wrap="square" lIns="0" tIns="0" rIns="0" bIns="0" rtlCol="0" anchor="t"/>
           <a:lstStyle/>
           <a:p>
-            <a:pPr indent="0" marL="0">
+            <a:pPr marL="0" indent="0">
               <a:buNone/>
             </a:pPr>
             <a:r>
@@ -3819,13 +4169,12 @@
             <a:avLst/>
           </a:prstGeom>
           <a:noFill/>
-          <a:ln/>
         </p:spPr>
         <p:txBody>
           <a:bodyPr wrap="square" lIns="0" tIns="0" rIns="0" bIns="0" rtlCol="0" anchor="ctr"/>
           <a:lstStyle/>
           <a:p>
-            <a:pPr algn="ctr" indent="0" marL="0">
+            <a:pPr marL="0" indent="0" algn="ctr">
               <a:buNone/>
             </a:pPr>
             <a:r>
@@ -3882,13 +4231,12 @@
             <a:avLst/>
           </a:prstGeom>
           <a:noFill/>
-          <a:ln/>
         </p:spPr>
         <p:txBody>
           <a:bodyPr wrap="square" lIns="0" tIns="0" rIns="0" bIns="0" rtlCol="0" anchor="ctr"/>
           <a:lstStyle/>
           <a:p>
-            <a:pPr algn="ctr" indent="0" marL="0">
+            <a:pPr marL="0" indent="0" algn="ctr">
               <a:buNone/>
             </a:pPr>
             <a:r>
@@ -3945,13 +4293,12 @@
             <a:avLst/>
           </a:prstGeom>
           <a:noFill/>
-          <a:ln/>
         </p:spPr>
         <p:txBody>
           <a:bodyPr wrap="square" lIns="0" tIns="0" rIns="0" bIns="0" rtlCol="0" anchor="ctr"/>
           <a:lstStyle/>
           <a:p>
-            <a:pPr algn="ctr" indent="0" marL="0">
+            <a:pPr marL="0" indent="0" algn="ctr">
               <a:buNone/>
             </a:pPr>
             <a:r>
@@ -4008,13 +4355,12 @@
             <a:avLst/>
           </a:prstGeom>
           <a:noFill/>
-          <a:ln/>
         </p:spPr>
         <p:txBody>
           <a:bodyPr wrap="square" lIns="0" tIns="0" rIns="0" bIns="0" rtlCol="0" anchor="ctr"/>
           <a:lstStyle/>
           <a:p>
-            <a:pPr algn="ctr" indent="0" marL="0">
+            <a:pPr marL="0" indent="0" algn="ctr">
               <a:buNone/>
             </a:pPr>
             <a:r>
@@ -4095,13 +4441,12 @@
             <a:avLst/>
           </a:prstGeom>
           <a:noFill/>
-          <a:ln/>
         </p:spPr>
         <p:txBody>
           <a:bodyPr wrap="square" lIns="0" tIns="0" rIns="0" bIns="0" rtlCol="0" anchor="t"/>
           <a:lstStyle/>
           <a:p>
-            <a:pPr indent="0" marL="0">
+            <a:pPr marL="0" indent="0">
               <a:buNone/>
             </a:pPr>
             <a:r>
@@ -4131,13 +4476,12 @@
             <a:avLst/>
           </a:prstGeom>
           <a:noFill/>
-          <a:ln/>
         </p:spPr>
         <p:txBody>
           <a:bodyPr wrap="square" lIns="0" tIns="0" rIns="0" bIns="0" rtlCol="0" anchor="t"/>
           <a:lstStyle/>
           <a:p>
-            <a:pPr indent="0" marL="0">
+            <a:pPr marL="0" indent="0">
               <a:buNone/>
             </a:pPr>
             <a:r>
@@ -4194,13 +4538,12 @@
             <a:avLst/>
           </a:prstGeom>
           <a:noFill/>
-          <a:ln/>
         </p:spPr>
         <p:txBody>
           <a:bodyPr wrap="square" lIns="0" tIns="0" rIns="0" bIns="0" rtlCol="0" anchor="ctr"/>
           <a:lstStyle/>
           <a:p>
-            <a:pPr algn="ctr" indent="0" marL="0">
+            <a:pPr marL="0" indent="0" algn="ctr">
               <a:buNone/>
             </a:pPr>
             <a:r>
@@ -4257,13 +4600,12 @@
             <a:avLst/>
           </a:prstGeom>
           <a:noFill/>
-          <a:ln/>
         </p:spPr>
         <p:txBody>
           <a:bodyPr wrap="square" lIns="0" tIns="0" rIns="0" bIns="0" rtlCol="0" anchor="ctr"/>
           <a:lstStyle/>
           <a:p>
-            <a:pPr algn="ctr" indent="0" marL="0">
+            <a:pPr marL="0" indent="0" algn="ctr">
               <a:buNone/>
             </a:pPr>
             <a:r>
@@ -4320,13 +4662,12 @@
             <a:avLst/>
           </a:prstGeom>
           <a:noFill/>
-          <a:ln/>
         </p:spPr>
         <p:txBody>
           <a:bodyPr wrap="square" lIns="0" tIns="0" rIns="0" bIns="0" rtlCol="0" anchor="ctr"/>
           <a:lstStyle/>
           <a:p>
-            <a:pPr algn="ctr" indent="0" marL="0">
+            <a:pPr marL="0" indent="0" algn="ctr">
               <a:buNone/>
             </a:pPr>
             <a:r>
@@ -4383,13 +4724,12 @@
             <a:avLst/>
           </a:prstGeom>
           <a:noFill/>
-          <a:ln/>
         </p:spPr>
         <p:txBody>
           <a:bodyPr wrap="square" lIns="0" tIns="0" rIns="0" bIns="0" rtlCol="0" anchor="ctr"/>
           <a:lstStyle/>
           <a:p>
-            <a:pPr algn="ctr" indent="0" marL="0">
+            <a:pPr marL="0" indent="0" algn="ctr">
               <a:buNone/>
             </a:pPr>
             <a:r>
@@ -4470,13 +4810,12 @@
             <a:avLst/>
           </a:prstGeom>
           <a:noFill/>
-          <a:ln/>
         </p:spPr>
         <p:txBody>
           <a:bodyPr wrap="square" lIns="0" tIns="0" rIns="0" bIns="0" rtlCol="0" anchor="t"/>
           <a:lstStyle/>
           <a:p>
-            <a:pPr indent="0" marL="0">
+            <a:pPr marL="0" indent="0">
               <a:buNone/>
             </a:pPr>
             <a:r>
@@ -4506,13 +4845,12 @@
             <a:avLst/>
           </a:prstGeom>
           <a:noFill/>
-          <a:ln/>
         </p:spPr>
         <p:txBody>
           <a:bodyPr wrap="square" lIns="0" tIns="0" rIns="0" bIns="0" rtlCol="0" anchor="t"/>
           <a:lstStyle/>
           <a:p>
-            <a:pPr indent="0" marL="0">
+            <a:pPr marL="0" indent="0">
               <a:buNone/>
             </a:pPr>
             <a:r>
@@ -4569,13 +4907,12 @@
             <a:avLst/>
           </a:prstGeom>
           <a:noFill/>
-          <a:ln/>
         </p:spPr>
         <p:txBody>
           <a:bodyPr wrap="square" lIns="0" tIns="0" rIns="0" bIns="0" rtlCol="0" anchor="ctr"/>
           <a:lstStyle/>
           <a:p>
-            <a:pPr algn="ctr" indent="0" marL="0">
+            <a:pPr marL="0" indent="0" algn="ctr">
               <a:buNone/>
             </a:pPr>
             <a:r>
@@ -4632,13 +4969,12 @@
             <a:avLst/>
           </a:prstGeom>
           <a:noFill/>
-          <a:ln/>
         </p:spPr>
         <p:txBody>
           <a:bodyPr wrap="square" lIns="0" tIns="0" rIns="0" bIns="0" rtlCol="0" anchor="ctr"/>
           <a:lstStyle/>
           <a:p>
-            <a:pPr algn="ctr" indent="0" marL="0">
+            <a:pPr marL="0" indent="0" algn="ctr">
               <a:buNone/>
             </a:pPr>
             <a:r>
@@ -4695,13 +5031,12 @@
             <a:avLst/>
           </a:prstGeom>
           <a:noFill/>
-          <a:ln/>
         </p:spPr>
         <p:txBody>
           <a:bodyPr wrap="square" lIns="0" tIns="0" rIns="0" bIns="0" rtlCol="0" anchor="ctr"/>
           <a:lstStyle/>
           <a:p>
-            <a:pPr algn="ctr" indent="0" marL="0">
+            <a:pPr marL="0" indent="0" algn="ctr">
               <a:buNone/>
             </a:pPr>
             <a:r>
@@ -4758,13 +5093,12 @@
             <a:avLst/>
           </a:prstGeom>
           <a:noFill/>
-          <a:ln/>
         </p:spPr>
         <p:txBody>
           <a:bodyPr wrap="square" lIns="0" tIns="0" rIns="0" bIns="0" rtlCol="0" anchor="ctr"/>
           <a:lstStyle/>
           <a:p>
-            <a:pPr algn="ctr" indent="0" marL="0">
+            <a:pPr marL="0" indent="0" algn="ctr">
               <a:buNone/>
             </a:pPr>
             <a:r>
@@ -4845,13 +5179,12 @@
             <a:avLst/>
           </a:prstGeom>
           <a:noFill/>
-          <a:ln/>
         </p:spPr>
         <p:txBody>
           <a:bodyPr wrap="square" lIns="0" tIns="0" rIns="0" bIns="0" rtlCol="0" anchor="t"/>
           <a:lstStyle/>
           <a:p>
-            <a:pPr indent="0" marL="0">
+            <a:pPr marL="0" indent="0">
               <a:buNone/>
             </a:pPr>
             <a:r>
@@ -4881,13 +5214,12 @@
             <a:avLst/>
           </a:prstGeom>
           <a:noFill/>
-          <a:ln/>
         </p:spPr>
         <p:txBody>
           <a:bodyPr wrap="square" lIns="0" tIns="0" rIns="0" bIns="0" rtlCol="0" anchor="t"/>
           <a:lstStyle/>
           <a:p>
-            <a:pPr indent="0" marL="0">
+            <a:pPr marL="0" indent="0">
               <a:buNone/>
             </a:pPr>
             <a:r>
@@ -4944,13 +5276,12 @@
             <a:avLst/>
           </a:prstGeom>
           <a:noFill/>
-          <a:ln/>
         </p:spPr>
         <p:txBody>
           <a:bodyPr wrap="square" lIns="0" tIns="0" rIns="0" bIns="0" rtlCol="0" anchor="ctr"/>
           <a:lstStyle/>
           <a:p>
-            <a:pPr algn="ctr" indent="0" marL="0">
+            <a:pPr marL="0" indent="0" algn="ctr">
               <a:buNone/>
             </a:pPr>
             <a:r>
@@ -5007,13 +5338,12 @@
             <a:avLst/>
           </a:prstGeom>
           <a:noFill/>
-          <a:ln/>
         </p:spPr>
         <p:txBody>
           <a:bodyPr wrap="square" lIns="0" tIns="0" rIns="0" bIns="0" rtlCol="0" anchor="ctr"/>
           <a:lstStyle/>
           <a:p>
-            <a:pPr algn="ctr" indent="0" marL="0">
+            <a:pPr marL="0" indent="0" algn="ctr">
               <a:buNone/>
             </a:pPr>
             <a:r>
@@ -5070,13 +5400,12 @@
             <a:avLst/>
           </a:prstGeom>
           <a:noFill/>
-          <a:ln/>
         </p:spPr>
         <p:txBody>
           <a:bodyPr wrap="square" lIns="0" tIns="0" rIns="0" bIns="0" rtlCol="0" anchor="ctr"/>
           <a:lstStyle/>
           <a:p>
-            <a:pPr algn="ctr" indent="0" marL="0">
+            <a:pPr marL="0" indent="0" algn="ctr">
               <a:buNone/>
             </a:pPr>
             <a:r>
@@ -5133,13 +5462,12 @@
             <a:avLst/>
           </a:prstGeom>
           <a:noFill/>
-          <a:ln/>
         </p:spPr>
         <p:txBody>
           <a:bodyPr wrap="square" lIns="0" tIns="0" rIns="0" bIns="0" rtlCol="0" anchor="ctr"/>
           <a:lstStyle/>
           <a:p>
-            <a:pPr algn="ctr" indent="0" marL="0">
+            <a:pPr marL="0" indent="0" algn="ctr">
               <a:buNone/>
             </a:pPr>
             <a:r>
@@ -5169,13 +5497,12 @@
             <a:avLst/>
           </a:prstGeom>
           <a:noFill/>
-          <a:ln/>
         </p:spPr>
         <p:txBody>
           <a:bodyPr wrap="square" lIns="0" tIns="0" rIns="0" bIns="0" rtlCol="0" anchor="t"/>
           <a:lstStyle/>
           <a:p>
-            <a:pPr indent="0" marL="0">
+            <a:pPr marL="0" indent="0">
               <a:buNone/>
             </a:pPr>
             <a:r>
@@ -5205,13 +5532,12 @@
             <a:avLst/>
           </a:prstGeom>
           <a:noFill/>
-          <a:ln/>
         </p:spPr>
         <p:txBody>
           <a:bodyPr wrap="square" lIns="0" tIns="0" rIns="0" bIns="0" rtlCol="0" anchor="t"/>
           <a:lstStyle/>
           <a:p>
-            <a:pPr indent="0" marL="0">
+            <a:pPr marL="0" indent="0">
               <a:buNone/>
             </a:pPr>
             <a:r>
@@ -5241,13 +5567,12 @@
             <a:avLst/>
           </a:prstGeom>
           <a:noFill/>
-          <a:ln/>
         </p:spPr>
         <p:txBody>
           <a:bodyPr wrap="square" lIns="0" tIns="0" rIns="0" bIns="0" rtlCol="0" anchor="t"/>
           <a:lstStyle/>
           <a:p>
-            <a:pPr indent="0" marL="0">
+            <a:pPr marL="0" indent="0">
               <a:buNone/>
             </a:pPr>
             <a:r>
@@ -5277,13 +5602,12 @@
             <a:avLst/>
           </a:prstGeom>
           <a:noFill/>
-          <a:ln/>
         </p:spPr>
         <p:txBody>
           <a:bodyPr wrap="square" lIns="0" tIns="0" rIns="0" bIns="0" rtlCol="0" anchor="t"/>
           <a:lstStyle/>
           <a:p>
-            <a:pPr indent="0" marL="0">
+            <a:pPr marL="0" indent="0">
               <a:buNone/>
             </a:pPr>
             <a:r>
@@ -5313,13 +5637,12 @@
             <a:avLst/>
           </a:prstGeom>
           <a:noFill/>
-          <a:ln/>
         </p:spPr>
         <p:txBody>
           <a:bodyPr wrap="square" lIns="0" tIns="0" rIns="0" bIns="0" rtlCol="0" anchor="t"/>
           <a:lstStyle/>
           <a:p>
-            <a:pPr indent="0" marL="0">
+            <a:pPr marL="0" indent="0">
               <a:buNone/>
             </a:pPr>
             <a:r>
@@ -5349,13 +5672,12 @@
             <a:avLst/>
           </a:prstGeom>
           <a:noFill/>
-          <a:ln/>
         </p:spPr>
         <p:txBody>
           <a:bodyPr wrap="square" lIns="0" tIns="0" rIns="0" bIns="0" rtlCol="0" anchor="t"/>
           <a:lstStyle/>
           <a:p>
-            <a:pPr indent="0" marL="0">
+            <a:pPr marL="0" indent="0">
               <a:buNone/>
             </a:pPr>
             <a:r>
@@ -5372,7 +5694,7 @@
       </p:sp>
       <p:sp>
         <p:nvSpPr>
-          <p:cNvPr id="25" name="Slide Number Placeholder 0"/>
+          <p:cNvPr id="56" name="Slide Number Placeholder 0"/>
           <p:cNvSpPr>
             <a:spLocks noGrp="1"/>
           </p:cNvSpPr>
@@ -5388,11 +5710,6 @@
           <a:prstGeom prst="rect">
             <a:avLst/>
           </a:prstGeom>
-          <a:extLst>
-            <a:ext uri="{C572A759-6A51-4108-AA02-DFA0A04FC94B}">
-              <ma14:wrappingTextBoxFlag xmlns:ma14="http://schemas.microsoft.com/office/mac/drawingml/2011/main" val="0"/>
-            </a:ext>
-          </a:extLst>
         </p:spPr>
         <p:txBody>
           <a:bodyPr/>
@@ -5408,8 +5725,7 @@
           <a:p>
             <a:pPr algn="l"/>
             <a:fld id="{F7021451-1387-4CA6-816F-3879F97B5CBC}" type="slidenum">
-              <a:rPr b="0" lang="en-US"/>
-              <a:t>3</a:t>
+              <a:rPr lang="en-US" b="0"/>
             </a:fld>
             <a:endParaRPr lang="en-US"/>
           </a:p>
@@ -5423,9 +5739,301 @@
 </p:sld>
 </file>
 
-<file path=ppt/slides/slide4.xml><?xml version="1.0" encoding="utf-8"?>
+<file path=ppt/slides/slide5.xml><?xml version="1.0" encoding="utf-8"?>
 <p:sld xmlns:a="http://schemas.openxmlformats.org/drawingml/2006/main" xmlns:r="http://schemas.openxmlformats.org/officeDocument/2006/relationships" xmlns:p="http://schemas.openxmlformats.org/presentationml/2006/main">
-  <p:cSld name="Slide 4">
+  <p:cSld>
+    <p:spTree>
+      <p:nvGrpSpPr>
+        <p:cNvPr id="1" name=""/>
+        <p:cNvGrpSpPr/>
+        <p:nvPr/>
+      </p:nvGrpSpPr>
+      <p:grpSpPr/>
+      <p:sp>
+        <p:nvSpPr>
+          <p:cNvPr id="2" name="Title 1"/>
+          <p:cNvSpPr>
+            <a:spLocks noGrp="1"/>
+          </p:cNvSpPr>
+          <p:nvPr>
+            <p:ph type="title" idx="100"/>
+          </p:nvPr>
+        </p:nvSpPr>
+        <p:spPr/>
+        <p:txBody>
+          <a:bodyPr/>
+          <a:lstStyle/>
+          <a:p>
+            <a:r>
+              <a:rPr sz="3000" b="1">
+                <a:solidFill>
+                  <a:srgbClr val="1B1F3B"/>
+                </a:solidFill>
+              </a:rPr>
+              <a:t>How the two parts fit: the context pack and the assistant</a:t>
+            </a:r>
+            <a:endParaRPr sz="3000" b="1">
+              <a:solidFill>
+                <a:srgbClr val="1B1F3B"/>
+              </a:solidFill>
+            </a:endParaRPr>
+          </a:p>
+        </p:txBody>
+      </p:sp>
+      <p:pic>
+        <p:nvPicPr>
+          <p:cNvPr id="3" name="Picture 2" descr="pitch_diagram.png"/>
+          <p:cNvPicPr>
+            <a:picLocks noChangeAspect="1"/>
+          </p:cNvPicPr>
+          <p:nvPr/>
+        </p:nvPicPr>
+        <p:blipFill>
+          <a:blip r:embed="rId1"/>
+          <a:stretch>
+            <a:fillRect/>
+          </a:stretch>
+        </p:blipFill>
+        <p:spPr>
+          <a:xfrm>
+            <a:off x="640080" y="1371600"/>
+            <a:ext cx="5269955" cy="4572000"/>
+          </a:xfrm>
+          <a:prstGeom prst="rect">
+            <a:avLst/>
+          </a:prstGeom>
+        </p:spPr>
+      </p:pic>
+      <p:sp>
+        <p:nvSpPr>
+          <p:cNvPr id="4" name="Rectangle 3"/>
+          <p:cNvSpPr/>
+          <p:nvPr/>
+        </p:nvSpPr>
+        <p:spPr>
+          <a:xfrm>
+            <a:off x="6184355" y="1371600"/>
+            <a:ext cx="5428525" cy="4572000"/>
+          </a:xfrm>
+          <a:prstGeom prst="rect">
+            <a:avLst/>
+          </a:prstGeom>
+          <a:solidFill>
+            <a:srgbClr val="F1F2F8"/>
+          </a:solidFill>
+          <a:ln>
+            <a:noFill/>
+          </a:ln>
+          <a:effectLst/>
+        </p:spPr>
+        <p:style>
+          <a:lnRef idx="1">
+            <a:schemeClr val="accent1"/>
+          </a:lnRef>
+          <a:fillRef idx="3">
+            <a:schemeClr val="accent1"/>
+          </a:fillRef>
+          <a:effectRef idx="2">
+            <a:schemeClr val="accent1"/>
+          </a:effectRef>
+          <a:fontRef idx="minor">
+            <a:schemeClr val="lt1"/>
+          </a:fontRef>
+        </p:style>
+        <p:txBody>
+          <a:bodyPr wrap="square" lIns="182880" tIns="137160" rIns="182880" rtlCol="0" anchor="t"/>
+          <a:lstStyle/>
+          <a:p>
+            <a:pPr algn="l">
+              <a:spcAft>
+                <a:spcPts val="900"/>
+              </a:spcAft>
+            </a:pPr>
+            <a:r>
+              <a:rPr sz="1300" b="1">
+                <a:solidFill>
+                  <a:srgbClr val="1B1F3B"/>
+                </a:solidFill>
+              </a:rPr>
+              <a:t>Inputs  </a:t>
+            </a:r>
+            <a:r>
+              <a:rPr sz="1200">
+                <a:solidFill>
+                  <a:srgbClr val="4A4F6B"/>
+                </a:solidFill>
+              </a:rPr>
+              <a:t>the three code repositories, the Greenplum tables and the team's notes and rules</a:t>
+            </a:r>
+            <a:endParaRPr sz="1200">
+              <a:solidFill>
+                <a:srgbClr val="4A4F6B"/>
+              </a:solidFill>
+            </a:endParaRPr>
+          </a:p>
+          <a:p>
+            <a:pPr algn="l">
+              <a:spcAft>
+                <a:spcPts val="900"/>
+              </a:spcAft>
+            </a:pPr>
+            <a:r>
+              <a:rPr sz="1300" b="1">
+                <a:solidFill>
+                  <a:srgbClr val="1B1F3B"/>
+                </a:solidFill>
+              </a:rPr>
+              <a:t>Knowledge Pack builder  </a:t>
+            </a:r>
+            <a:r>
+              <a:rPr sz="1200">
+                <a:solidFill>
+                  <a:srgbClr val="4A4F6B"/>
+                </a:solidFill>
+              </a:rPr>
+              <a:t>a scheduled job collects the facts – folder purposes, registration and companion rules, naming, standards, search index – into one context pack per system and e-mails what changed</a:t>
+            </a:r>
+            <a:endParaRPr sz="1200">
+              <a:solidFill>
+                <a:srgbClr val="4A4F6B"/>
+              </a:solidFill>
+            </a:endParaRPr>
+          </a:p>
+          <a:p>
+            <a:pPr algn="l">
+              <a:spcAft>
+                <a:spcPts val="900"/>
+              </a:spcAft>
+            </a:pPr>
+            <a:r>
+              <a:rPr sz="1300" b="1">
+                <a:solidFill>
+                  <a:srgbClr val="1B1F3B"/>
+                </a:solidFill>
+              </a:rPr>
+              <a:t>Dev Assistant  </a:t>
+            </a:r>
+            <a:r>
+              <a:rPr sz="1200">
+                <a:solidFill>
+                  <a:srgbClr val="4A4F6B"/>
+                </a:solidFill>
+              </a:rPr>
+              <a:t>combines the pack with the story: read → ground → plan → code → check, in about 5–10 minutes</a:t>
+            </a:r>
+            <a:endParaRPr sz="1200">
+              <a:solidFill>
+                <a:srgbClr val="4A4F6B"/>
+              </a:solidFill>
+            </a:endParaRPr>
+          </a:p>
+          <a:p>
+            <a:pPr algn="l">
+              <a:spcAft>
+                <a:spcPts val="900"/>
+              </a:spcAft>
+            </a:pPr>
+            <a:r>
+              <a:rPr sz="1300" b="1">
+                <a:solidFill>
+                  <a:srgbClr val="1B1F3B"/>
+                </a:solidFill>
+              </a:rPr>
+              <a:t>Git  </a:t>
+            </a:r>
+            <a:r>
+              <a:rPr sz="1200">
+                <a:solidFill>
+                  <a:srgbClr val="4A4F6B"/>
+                </a:solidFill>
+              </a:rPr>
+              <a:t>feature branch, one commit per run, merge request – all in the developer's name</a:t>
+            </a:r>
+            <a:endParaRPr sz="1200">
+              <a:solidFill>
+                <a:srgbClr val="4A4F6B"/>
+              </a:solidFill>
+            </a:endParaRPr>
+          </a:p>
+          <a:p>
+            <a:pPr algn="l">
+              <a:spcAft>
+                <a:spcPts val="900"/>
+              </a:spcAft>
+            </a:pPr>
+            <a:r>
+              <a:rPr sz="1300" b="1">
+                <a:solidFill>
+                  <a:srgbClr val="1B1F3B"/>
+                </a:solidFill>
+              </a:rPr>
+              <a:t>People decide  </a:t>
+            </a:r>
+            <a:r>
+              <a:rPr sz="1200">
+                <a:solidFill>
+                  <a:srgbClr val="4A4F6B"/>
+                </a:solidFill>
+              </a:rPr>
+              <a:t>a person reads the diff, tests it and merges; the tool never merges</a:t>
+            </a:r>
+            <a:endParaRPr sz="1200">
+              <a:solidFill>
+                <a:srgbClr val="4A4F6B"/>
+              </a:solidFill>
+            </a:endParaRPr>
+          </a:p>
+        </p:txBody>
+      </p:sp>
+      <p:sp>
+        <p:nvSpPr>
+          <p:cNvPr id="5" name="TextBox 4"/>
+          <p:cNvSpPr txBox="1"/>
+          <p:nvPr/>
+        </p:nvSpPr>
+        <p:spPr>
+          <a:xfrm>
+            <a:off x="640080" y="6035040"/>
+            <a:ext cx="10972800" cy="365760"/>
+          </a:xfrm>
+          <a:prstGeom prst="rect">
+            <a:avLst/>
+          </a:prstGeom>
+          <a:noFill/>
+        </p:spPr>
+        <p:txBody>
+          <a:bodyPr wrap="square">
+            <a:spAutoFit/>
+          </a:bodyPr>
+          <a:lstStyle/>
+          <a:p>
+            <a:r>
+              <a:rPr sz="1250" i="1">
+                <a:solidFill>
+                  <a:srgbClr val="6C5CE7"/>
+                </a:solidFill>
+              </a:rPr>
+              <a:t>The pack holds what the assistant needs to know; the assistant does the routine work of a story; a person merges.</a:t>
+            </a:r>
+            <a:endParaRPr sz="1250" i="1">
+              <a:solidFill>
+                <a:srgbClr val="6C5CE7"/>
+              </a:solidFill>
+            </a:endParaRPr>
+          </a:p>
+        </p:txBody>
+      </p:sp>
+    </p:spTree>
+  </p:cSld>
+  <p:clrMapOvr>
+    <a:masterClrMapping/>
+  </p:clrMapOvr>
+</p:sld>
+</file>
+
+<file path=ppt/slides/slide6.xml><?xml version="1.0" encoding="utf-8"?>
+<p:sld xmlns:a="http://schemas.openxmlformats.org/drawingml/2006/main" xmlns:r="http://schemas.openxmlformats.org/officeDocument/2006/relationships" xmlns:p="http://schemas.openxmlformats.org/presentationml/2006/main">
+  <p:cSld>
     <p:spTree>
       <p:nvGrpSpPr>
         <p:cNvPr id="1" name=""/>
@@ -5445,7 +6053,7 @@
           <p:cNvPr id="2" name="Text 0"/>
           <p:cNvSpPr/>
           <p:nvPr>
-            <p:ph idx="100" type="title" hasCustomPrompt="1"/>
+            <p:ph type="title" idx="100" hasCustomPrompt="1"/>
           </p:nvPr>
         </p:nvSpPr>
         <p:spPr>
@@ -5457,13 +6065,12 @@
             <a:avLst/>
           </a:prstGeom>
           <a:noFill/>
-          <a:ln/>
         </p:spPr>
         <p:txBody>
           <a:bodyPr wrap="square" lIns="0" tIns="0" rIns="0" bIns="0" rtlCol="0"/>
           <a:lstStyle/>
           <a:p>
-            <a:pPr algn="l" indent="0" marL="0">
+            <a:pPr marL="0" indent="0" algn="l">
               <a:buNone/>
             </a:pPr>
             <a:r>
@@ -5520,13 +6127,12 @@
             <a:avLst/>
           </a:prstGeom>
           <a:noFill/>
-          <a:ln/>
         </p:spPr>
         <p:txBody>
           <a:bodyPr wrap="square" lIns="0" tIns="0" rIns="0" bIns="0" rtlCol="0" anchor="t"/>
           <a:lstStyle/>
           <a:p>
-            <a:pPr indent="0" marL="0">
+            <a:pPr marL="0" indent="0">
               <a:buNone/>
             </a:pPr>
             <a:r>
@@ -5556,13 +6162,12 @@
             <a:avLst/>
           </a:prstGeom>
           <a:noFill/>
-          <a:ln/>
         </p:spPr>
         <p:txBody>
           <a:bodyPr wrap="square" lIns="0" tIns="0" rIns="0" bIns="0" rtlCol="0" anchor="t"/>
           <a:lstStyle/>
           <a:p>
-            <a:pPr indent="0" marL="0">
+            <a:pPr marL="0" indent="0">
               <a:buNone/>
             </a:pPr>
             <a:r>
@@ -5643,13 +6248,12 @@
             <a:avLst/>
           </a:prstGeom>
           <a:noFill/>
-          <a:ln/>
         </p:spPr>
         <p:txBody>
           <a:bodyPr wrap="square" lIns="0" tIns="0" rIns="0" bIns="0" rtlCol="0" anchor="t"/>
           <a:lstStyle/>
           <a:p>
-            <a:pPr indent="0" marL="0">
+            <a:pPr marL="0" indent="0">
               <a:buNone/>
             </a:pPr>
             <a:r>
@@ -5679,13 +6283,12 @@
             <a:avLst/>
           </a:prstGeom>
           <a:noFill/>
-          <a:ln/>
         </p:spPr>
         <p:txBody>
           <a:bodyPr wrap="square" lIns="0" tIns="0" rIns="0" bIns="0" rtlCol="0" anchor="t"/>
           <a:lstStyle/>
           <a:p>
-            <a:pPr indent="0" marL="0">
+            <a:pPr marL="0" indent="0">
               <a:buNone/>
             </a:pPr>
             <a:r>
@@ -5766,13 +6369,12 @@
             <a:avLst/>
           </a:prstGeom>
           <a:noFill/>
-          <a:ln/>
         </p:spPr>
         <p:txBody>
           <a:bodyPr wrap="square" lIns="0" tIns="0" rIns="0" bIns="0" rtlCol="0" anchor="t"/>
           <a:lstStyle/>
           <a:p>
-            <a:pPr indent="0" marL="0">
+            <a:pPr marL="0" indent="0">
               <a:buNone/>
             </a:pPr>
             <a:r>
@@ -5802,13 +6404,12 @@
             <a:avLst/>
           </a:prstGeom>
           <a:noFill/>
-          <a:ln/>
         </p:spPr>
         <p:txBody>
           <a:bodyPr wrap="square" lIns="0" tIns="0" rIns="0" bIns="0" rtlCol="0" anchor="t"/>
           <a:lstStyle/>
           <a:p>
-            <a:pPr indent="0" marL="0">
+            <a:pPr marL="0" indent="0">
               <a:buNone/>
             </a:pPr>
             <a:r>
@@ -5889,13 +6490,12 @@
             <a:avLst/>
           </a:prstGeom>
           <a:noFill/>
-          <a:ln/>
         </p:spPr>
         <p:txBody>
           <a:bodyPr wrap="square" lIns="0" tIns="0" rIns="0" bIns="0" rtlCol="0" anchor="t"/>
           <a:lstStyle/>
           <a:p>
-            <a:pPr algn="ctr" indent="0" marL="0">
+            <a:pPr marL="0" indent="0" algn="ctr">
               <a:buNone/>
             </a:pPr>
             <a:r>
@@ -5925,13 +6525,12 @@
             <a:avLst/>
           </a:prstGeom>
           <a:noFill/>
-          <a:ln/>
         </p:spPr>
         <p:txBody>
           <a:bodyPr wrap="square" lIns="0" tIns="0" rIns="0" bIns="0" rtlCol="0" anchor="t"/>
           <a:lstStyle/>
           <a:p>
-            <a:pPr algn="ctr" indent="0" marL="0">
+            <a:pPr marL="0" indent="0" algn="ctr">
               <a:buNone/>
             </a:pPr>
             <a:r>
@@ -5945,7 +6544,7 @@
             <a:endParaRPr lang="en-US" sz="1050" dirty="0"/>
           </a:p>
           <a:p>
-            <a:pPr algn="ctr" indent="0" marL="0">
+            <a:pPr marL="0" indent="0" algn="ctr">
               <a:buNone/>
             </a:pPr>
             <a:r>
@@ -5959,7 +6558,7 @@
             <a:endParaRPr lang="en-US" sz="1050" dirty="0"/>
           </a:p>
           <a:p>
-            <a:pPr algn="ctr" indent="0" marL="0">
+            <a:pPr marL="0" indent="0" algn="ctr">
               <a:buNone/>
             </a:pPr>
             <a:r>
@@ -5973,7 +6572,7 @@
             <a:endParaRPr lang="en-US" sz="1050" dirty="0"/>
           </a:p>
           <a:p>
-            <a:pPr algn="ctr" indent="0" marL="0">
+            <a:pPr marL="0" indent="0" algn="ctr">
               <a:buNone/>
             </a:pPr>
             <a:r>
@@ -5987,7 +6586,7 @@
             <a:endParaRPr lang="en-US" sz="1050" dirty="0"/>
           </a:p>
           <a:p>
-            <a:pPr algn="ctr" indent="0" marL="0">
+            <a:pPr marL="0" indent="0" algn="ctr">
               <a:buNone/>
             </a:pPr>
             <a:r>
@@ -6001,7 +6600,7 @@
             <a:endParaRPr lang="en-US" sz="1050" dirty="0"/>
           </a:p>
           <a:p>
-            <a:pPr algn="ctr" indent="0" marL="0">
+            <a:pPr marL="0" indent="0" algn="ctr">
               <a:buNone/>
             </a:pPr>
             <a:r>
@@ -6082,13 +6681,12 @@
             <a:avLst/>
           </a:prstGeom>
           <a:noFill/>
-          <a:ln/>
         </p:spPr>
         <p:txBody>
           <a:bodyPr wrap="square" lIns="0" tIns="0" rIns="0" bIns="0" rtlCol="0" anchor="t"/>
           <a:lstStyle/>
           <a:p>
-            <a:pPr indent="0" marL="0">
+            <a:pPr marL="0" indent="0">
               <a:buNone/>
             </a:pPr>
             <a:r>
@@ -6096,9 +6694,9 @@
                 <a:solidFill>
                   <a:srgbClr val="1B1F3B"/>
                 </a:solidFill>
-                <a:latin typeface="Consolas" pitchFamily="34" charset="0"/>
-                <a:ea typeface="Consolas" pitchFamily="34" charset="-122"/>
-                <a:cs typeface="Consolas" pitchFamily="34" charset="-120"/>
+                <a:latin typeface="Consolas" panose="020B0609020204030204" pitchFamily="34" charset="0"/>
+                <a:ea typeface="Consolas" panose="020B0609020204030204" pitchFamily="34" charset="-122"/>
+                <a:cs typeface="Consolas" panose="020B0609020204030204" pitchFamily="34" charset="-120"/>
               </a:rPr>
               <a:t>beneficiary_update_flags_ikg.sql</a:t>
             </a:r>
@@ -6121,13 +6719,12 @@
             <a:avLst/>
           </a:prstGeom>
           <a:noFill/>
-          <a:ln/>
         </p:spPr>
         <p:txBody>
           <a:bodyPr wrap="square" lIns="0" tIns="0" rIns="0" bIns="0" rtlCol="0" anchor="t"/>
           <a:lstStyle/>
           <a:p>
-            <a:pPr indent="0" marL="0">
+            <a:pPr marL="0" indent="0">
               <a:buNone/>
             </a:pPr>
             <a:r>
@@ -6184,13 +6781,12 @@
             <a:avLst/>
           </a:prstGeom>
           <a:noFill/>
-          <a:ln/>
         </p:spPr>
         <p:txBody>
           <a:bodyPr wrap="square" lIns="0" tIns="0" rIns="0" bIns="0" rtlCol="0" anchor="t"/>
           <a:lstStyle/>
           <a:p>
-            <a:pPr indent="0" marL="0">
+            <a:pPr marL="0" indent="0">
               <a:buNone/>
             </a:pPr>
             <a:r>
@@ -6198,9 +6794,9 @@
                 <a:solidFill>
                   <a:srgbClr val="1B1F3B"/>
                 </a:solidFill>
-                <a:latin typeface="Consolas" pitchFamily="34" charset="0"/>
-                <a:ea typeface="Consolas" pitchFamily="34" charset="-122"/>
-                <a:cs typeface="Consolas" pitchFamily="34" charset="-120"/>
+                <a:latin typeface="Consolas" panose="020B0609020204030204" pitchFamily="34" charset="0"/>
+                <a:ea typeface="Consolas" panose="020B0609020204030204" pitchFamily="34" charset="-122"/>
+                <a:cs typeface="Consolas" panose="020B0609020204030204" pitchFamily="34" charset="-120"/>
               </a:rPr>
               <a:t>client_beneficiary_profile_curr_ikg.sql</a:t>
             </a:r>
@@ -6223,13 +6819,12 @@
             <a:avLst/>
           </a:prstGeom>
           <a:noFill/>
-          <a:ln/>
         </p:spPr>
         <p:txBody>
           <a:bodyPr wrap="square" lIns="0" tIns="0" rIns="0" bIns="0" rtlCol="0" anchor="t"/>
           <a:lstStyle/>
           <a:p>
-            <a:pPr indent="0" marL="0">
+            <a:pPr marL="0" indent="0">
               <a:buNone/>
             </a:pPr>
             <a:r>
@@ -6286,13 +6881,12 @@
             <a:avLst/>
           </a:prstGeom>
           <a:noFill/>
-          <a:ln/>
         </p:spPr>
         <p:txBody>
           <a:bodyPr wrap="square" lIns="0" tIns="0" rIns="0" bIns="0" rtlCol="0" anchor="t"/>
           <a:lstStyle/>
           <a:p>
-            <a:pPr indent="0" marL="0">
+            <a:pPr marL="0" indent="0">
               <a:buNone/>
             </a:pPr>
             <a:r>
@@ -6300,9 +6894,9 @@
                 <a:solidFill>
                   <a:srgbClr val="1B1F3B"/>
                 </a:solidFill>
-                <a:latin typeface="Consolas" pitchFamily="34" charset="0"/>
-                <a:ea typeface="Consolas" pitchFamily="34" charset="-122"/>
-                <a:cs typeface="Consolas" pitchFamily="34" charset="-120"/>
+                <a:latin typeface="Consolas" panose="020B0609020204030204" pitchFamily="34" charset="0"/>
+                <a:ea typeface="Consolas" panose="020B0609020204030204" pitchFamily="34" charset="-122"/>
+                <a:cs typeface="Consolas" panose="020B0609020204030204" pitchFamily="34" charset="-120"/>
               </a:rPr>
               <a:t>…_profile_ikg.sql (history)</a:t>
             </a:r>
@@ -6325,13 +6919,12 @@
             <a:avLst/>
           </a:prstGeom>
           <a:noFill/>
-          <a:ln/>
         </p:spPr>
         <p:txBody>
           <a:bodyPr wrap="square" lIns="0" tIns="0" rIns="0" bIns="0" rtlCol="0" anchor="t"/>
           <a:lstStyle/>
           <a:p>
-            <a:pPr indent="0" marL="0">
+            <a:pPr marL="0" indent="0">
               <a:buNone/>
             </a:pPr>
             <a:r>
@@ -6388,13 +6981,12 @@
             <a:avLst/>
           </a:prstGeom>
           <a:noFill/>
-          <a:ln/>
         </p:spPr>
         <p:txBody>
           <a:bodyPr wrap="square" lIns="0" tIns="0" rIns="0" bIns="0" rtlCol="0" anchor="t"/>
           <a:lstStyle/>
           <a:p>
-            <a:pPr indent="0" marL="0">
+            <a:pPr marL="0" indent="0">
               <a:buNone/>
             </a:pPr>
             <a:r>
@@ -6402,9 +6994,9 @@
                 <a:solidFill>
                   <a:srgbClr val="1B1F3B"/>
                 </a:solidFill>
-                <a:latin typeface="Consolas" pitchFamily="34" charset="0"/>
-                <a:ea typeface="Consolas" pitchFamily="34" charset="-122"/>
-                <a:cs typeface="Consolas" pitchFamily="34" charset="-120"/>
+                <a:latin typeface="Consolas" panose="020B0609020204030204" pitchFamily="34" charset="0"/>
+                <a:ea typeface="Consolas" panose="020B0609020204030204" pitchFamily="34" charset="-122"/>
+                <a:cs typeface="Consolas" panose="020B0609020204030204" pitchFamily="34" charset="-120"/>
               </a:rPr>
               <a:t>ikg_data_refresh.py (DAG)</a:t>
             </a:r>
@@ -6427,13 +7019,12 @@
             <a:avLst/>
           </a:prstGeom>
           <a:noFill/>
-          <a:ln/>
         </p:spPr>
         <p:txBody>
           <a:bodyPr wrap="square" lIns="0" tIns="0" rIns="0" bIns="0" rtlCol="0" anchor="t"/>
           <a:lstStyle/>
           <a:p>
-            <a:pPr indent="0" marL="0">
+            <a:pPr marL="0" indent="0">
               <a:buNone/>
             </a:pPr>
             <a:r>
@@ -6490,13 +7081,12 @@
             <a:avLst/>
           </a:prstGeom>
           <a:noFill/>
-          <a:ln/>
         </p:spPr>
         <p:txBody>
           <a:bodyPr wrap="square" lIns="0" tIns="0" rIns="0" bIns="0" rtlCol="0" anchor="t"/>
           <a:lstStyle/>
           <a:p>
-            <a:pPr indent="0" marL="0">
+            <a:pPr marL="0" indent="0">
               <a:buNone/>
             </a:pPr>
             <a:r>
@@ -6504,9 +7094,9 @@
                 <a:solidFill>
                   <a:srgbClr val="1B1F3B"/>
                 </a:solidFill>
-                <a:latin typeface="Consolas" pitchFamily="34" charset="0"/>
-                <a:ea typeface="Consolas" pitchFamily="34" charset="-122"/>
-                <a:cs typeface="Consolas" pitchFamily="34" charset="-120"/>
+                <a:latin typeface="Consolas" panose="020B0609020204030204" pitchFamily="34" charset="0"/>
+                <a:ea typeface="Consolas" panose="020B0609020204030204" pitchFamily="34" charset="-122"/>
+                <a:cs typeface="Consolas" panose="020B0609020204030204" pitchFamily="34" charset="-120"/>
               </a:rPr>
               <a:t>validate_…ipynb</a:t>
             </a:r>
@@ -6529,13 +7119,12 @@
             <a:avLst/>
           </a:prstGeom>
           <a:noFill/>
-          <a:ln/>
         </p:spPr>
         <p:txBody>
           <a:bodyPr wrap="square" lIns="0" tIns="0" rIns="0" bIns="0" rtlCol="0" anchor="t"/>
           <a:lstStyle/>
           <a:p>
-            <a:pPr indent="0" marL="0">
+            <a:pPr marL="0" indent="0">
               <a:buNone/>
             </a:pPr>
             <a:r>
@@ -6617,13 +7206,12 @@
             <a:avLst/>
           </a:prstGeom>
           <a:noFill/>
-          <a:ln/>
         </p:spPr>
         <p:txBody>
           <a:bodyPr wrap="square" lIns="0" tIns="0" rIns="0" bIns="0" rtlCol="0" anchor="ctr"/>
           <a:lstStyle/>
           <a:p>
-            <a:pPr algn="ctr" indent="0" marL="0">
+            <a:pPr marL="0" indent="0" algn="ctr">
               <a:buNone/>
             </a:pPr>
             <a:r>
@@ -6653,13 +7241,12 @@
             <a:avLst/>
           </a:prstGeom>
           <a:noFill/>
-          <a:ln/>
         </p:spPr>
         <p:txBody>
           <a:bodyPr wrap="square" lIns="0" tIns="0" rIns="0" bIns="0" rtlCol="0" anchor="ctr"/>
           <a:lstStyle/>
           <a:p>
-            <a:pPr indent="0" marL="0">
+            <a:pPr marL="0" indent="0">
               <a:buNone/>
             </a:pPr>
             <a:r>
@@ -6689,13 +7276,12 @@
             <a:avLst/>
           </a:prstGeom>
           <a:noFill/>
-          <a:ln/>
         </p:spPr>
         <p:txBody>
           <a:bodyPr wrap="square" lIns="0" tIns="0" rIns="0" bIns="0" rtlCol="0" anchor="t"/>
           <a:lstStyle/>
           <a:p>
-            <a:pPr indent="0" marL="0">
+            <a:pPr marL="0" indent="0">
               <a:buNone/>
             </a:pPr>
             <a:r>
@@ -6801,13 +7387,12 @@
             <a:avLst/>
           </a:prstGeom>
           <a:noFill/>
-          <a:ln/>
         </p:spPr>
         <p:txBody>
           <a:bodyPr wrap="square" lIns="0" tIns="0" rIns="0" bIns="0" rtlCol="0" anchor="ctr"/>
           <a:lstStyle/>
           <a:p>
-            <a:pPr algn="ctr" indent="0" marL="0">
+            <a:pPr marL="0" indent="0" algn="ctr">
               <a:buNone/>
             </a:pPr>
             <a:r>
@@ -6837,13 +7422,12 @@
             <a:avLst/>
           </a:prstGeom>
           <a:noFill/>
-          <a:ln/>
         </p:spPr>
         <p:txBody>
           <a:bodyPr wrap="square" lIns="0" tIns="0" rIns="0" bIns="0" rtlCol="0" anchor="ctr"/>
           <a:lstStyle/>
           <a:p>
-            <a:pPr indent="0" marL="0">
+            <a:pPr marL="0" indent="0">
               <a:buNone/>
             </a:pPr>
             <a:r>
@@ -6873,13 +7457,12 @@
             <a:avLst/>
           </a:prstGeom>
           <a:noFill/>
-          <a:ln/>
         </p:spPr>
         <p:txBody>
           <a:bodyPr wrap="square" lIns="0" tIns="0" rIns="0" bIns="0" rtlCol="0" anchor="t"/>
           <a:lstStyle/>
           <a:p>
-            <a:pPr indent="0" marL="0">
+            <a:pPr marL="0" indent="0">
               <a:buNone/>
             </a:pPr>
             <a:r>
@@ -6985,13 +7568,12 @@
             <a:avLst/>
           </a:prstGeom>
           <a:noFill/>
-          <a:ln/>
         </p:spPr>
         <p:txBody>
           <a:bodyPr wrap="square" lIns="0" tIns="0" rIns="0" bIns="0" rtlCol="0" anchor="ctr"/>
           <a:lstStyle/>
           <a:p>
-            <a:pPr algn="ctr" indent="0" marL="0">
+            <a:pPr marL="0" indent="0" algn="ctr">
               <a:buNone/>
             </a:pPr>
             <a:r>
@@ -7021,13 +7603,12 @@
             <a:avLst/>
           </a:prstGeom>
           <a:noFill/>
-          <a:ln/>
         </p:spPr>
         <p:txBody>
           <a:bodyPr wrap="square" lIns="0" tIns="0" rIns="0" bIns="0" rtlCol="0" anchor="ctr"/>
           <a:lstStyle/>
           <a:p>
-            <a:pPr indent="0" marL="0">
+            <a:pPr marL="0" indent="0">
               <a:buNone/>
             </a:pPr>
             <a:r>
@@ -7057,13 +7638,12 @@
             <a:avLst/>
           </a:prstGeom>
           <a:noFill/>
-          <a:ln/>
         </p:spPr>
         <p:txBody>
           <a:bodyPr wrap="square" lIns="0" tIns="0" rIns="0" bIns="0" rtlCol="0" anchor="t"/>
           <a:lstStyle/>
           <a:p>
-            <a:pPr indent="0" marL="0">
+            <a:pPr marL="0" indent="0">
               <a:buNone/>
             </a:pPr>
             <a:r>
@@ -7093,13 +7673,12 @@
             <a:avLst/>
           </a:prstGeom>
           <a:noFill/>
-          <a:ln/>
         </p:spPr>
         <p:txBody>
           <a:bodyPr wrap="square" lIns="0" tIns="0" rIns="0" bIns="0" rtlCol="0" anchor="t"/>
           <a:lstStyle/>
           <a:p>
-            <a:pPr indent="0" marL="0">
+            <a:pPr marL="0" indent="0">
               <a:buNone/>
             </a:pPr>
             <a:r>
@@ -7116,7 +7695,7 @@
       </p:sp>
       <p:sp>
         <p:nvSpPr>
-          <p:cNvPr id="25" name="Slide Number Placeholder 0"/>
+          <p:cNvPr id="52" name="Slide Number Placeholder 0"/>
           <p:cNvSpPr>
             <a:spLocks noGrp="1"/>
           </p:cNvSpPr>
@@ -7132,11 +7711,6 @@
           <a:prstGeom prst="rect">
             <a:avLst/>
           </a:prstGeom>
-          <a:extLst>
-            <a:ext uri="{C572A759-6A51-4108-AA02-DFA0A04FC94B}">
-              <ma14:wrappingTextBoxFlag xmlns:ma14="http://schemas.microsoft.com/office/mac/drawingml/2011/main" val="0"/>
-            </a:ext>
-          </a:extLst>
         </p:spPr>
         <p:txBody>
           <a:bodyPr/>
@@ -7152,8 +7726,7 @@
           <a:p>
             <a:pPr algn="l"/>
             <a:fld id="{F7021451-1387-4CA6-816F-3879F97B5CBC}" type="slidenum">
-              <a:rPr b="0" lang="en-US"/>
-              <a:t>4</a:t>
+              <a:rPr lang="en-US" b="0"/>
             </a:fld>
             <a:endParaRPr lang="en-US"/>
           </a:p>
@@ -7167,9 +7740,9 @@
 </p:sld>
 </file>
 
-<file path=ppt/slides/slide5.xml><?xml version="1.0" encoding="utf-8"?>
+<file path=ppt/slides/slide7.xml><?xml version="1.0" encoding="utf-8"?>
 <p:sld xmlns:a="http://schemas.openxmlformats.org/drawingml/2006/main" xmlns:r="http://schemas.openxmlformats.org/officeDocument/2006/relationships" xmlns:p="http://schemas.openxmlformats.org/presentationml/2006/main">
-  <p:cSld name="Slide 5">
+  <p:cSld>
     <p:spTree>
       <p:nvGrpSpPr>
         <p:cNvPr id="1" name=""/>
@@ -7189,7 +7762,7 @@
           <p:cNvPr id="2" name="Text 0"/>
           <p:cNvSpPr/>
           <p:nvPr>
-            <p:ph idx="100" type="title" hasCustomPrompt="1"/>
+            <p:ph type="title" idx="100" hasCustomPrompt="1"/>
           </p:nvPr>
         </p:nvSpPr>
         <p:spPr>
@@ -7201,13 +7774,12 @@
             <a:avLst/>
           </a:prstGeom>
           <a:noFill/>
-          <a:ln/>
         </p:spPr>
         <p:txBody>
           <a:bodyPr wrap="square" lIns="0" tIns="0" rIns="0" bIns="0" rtlCol="0"/>
           <a:lstStyle/>
           <a:p>
-            <a:pPr algn="l" indent="0" marL="0">
+            <a:pPr marL="0" indent="0" algn="l">
               <a:buNone/>
             </a:pPr>
             <a:r>
@@ -7237,13 +7809,12 @@
             <a:avLst/>
           </a:prstGeom>
           <a:noFill/>
-          <a:ln/>
         </p:spPr>
         <p:txBody>
           <a:bodyPr wrap="square" lIns="0" tIns="0" rIns="0" bIns="0" rtlCol="0" anchor="t"/>
           <a:lstStyle/>
           <a:p>
-            <a:pPr indent="0" marL="0">
+            <a:pPr marL="0" indent="0">
               <a:buNone/>
             </a:pPr>
             <a:r>
@@ -7251,9 +7822,9 @@
                 <a:solidFill>
                   <a:srgbClr val="22B8CF"/>
                 </a:solidFill>
-                <a:latin typeface="Cambria" pitchFamily="34" charset="0"/>
-                <a:ea typeface="Cambria" pitchFamily="34" charset="-122"/>
-                <a:cs typeface="Cambria" pitchFamily="34" charset="-120"/>
+                <a:latin typeface="Cambria" panose="02040503050406030204" pitchFamily="34" charset="0"/>
+                <a:ea typeface="Cambria" panose="02040503050406030204" pitchFamily="34" charset="-122"/>
+                <a:cs typeface="Cambria" panose="02040503050406030204" pitchFamily="34" charset="-120"/>
               </a:rPr>
               <a:t>40%</a:t>
             </a:r>
@@ -7276,13 +7847,12 @@
             <a:avLst/>
           </a:prstGeom>
           <a:noFill/>
-          <a:ln/>
         </p:spPr>
         <p:txBody>
           <a:bodyPr wrap="square" lIns="0" tIns="0" rIns="0" bIns="0" rtlCol="0" anchor="t"/>
           <a:lstStyle/>
           <a:p>
-            <a:pPr indent="0" marL="0">
+            <a:pPr marL="0" indent="0">
               <a:buNone/>
             </a:pPr>
             <a:r>
@@ -7312,13 +7882,12 @@
             <a:avLst/>
           </a:prstGeom>
           <a:noFill/>
-          <a:ln/>
         </p:spPr>
         <p:txBody>
           <a:bodyPr wrap="square" lIns="0" tIns="0" rIns="0" bIns="0" rtlCol="0" anchor="t"/>
           <a:lstStyle/>
           <a:p>
-            <a:pPr indent="0" marL="0">
+            <a:pPr marL="0" indent="0">
               <a:buNone/>
             </a:pPr>
             <a:r>
@@ -7348,13 +7917,12 @@
             <a:avLst/>
           </a:prstGeom>
           <a:noFill/>
-          <a:ln/>
         </p:spPr>
         <p:txBody>
           <a:bodyPr wrap="square" lIns="0" tIns="0" rIns="0" bIns="0" rtlCol="0" anchor="t"/>
           <a:lstStyle/>
           <a:p>
-            <a:pPr indent="0" marL="0">
+            <a:pPr marL="0" indent="0">
               <a:buNone/>
             </a:pPr>
             <a:r>
@@ -7362,9 +7930,9 @@
                 <a:solidFill>
                   <a:srgbClr val="E6A23C"/>
                 </a:solidFill>
-                <a:latin typeface="Cambria" pitchFamily="34" charset="0"/>
-                <a:ea typeface="Cambria" pitchFamily="34" charset="-122"/>
-                <a:cs typeface="Cambria" pitchFamily="34" charset="-120"/>
+                <a:latin typeface="Cambria" panose="02040503050406030204" pitchFamily="34" charset="0"/>
+                <a:ea typeface="Cambria" panose="02040503050406030204" pitchFamily="34" charset="-122"/>
+                <a:cs typeface="Cambria" panose="02040503050406030204" pitchFamily="34" charset="-120"/>
               </a:rPr>
               <a:t>35%</a:t>
             </a:r>
@@ -7387,13 +7955,12 @@
             <a:avLst/>
           </a:prstGeom>
           <a:noFill/>
-          <a:ln/>
         </p:spPr>
         <p:txBody>
           <a:bodyPr wrap="square" lIns="0" tIns="0" rIns="0" bIns="0" rtlCol="0" anchor="t"/>
           <a:lstStyle/>
           <a:p>
-            <a:pPr indent="0" marL="0">
+            <a:pPr marL="0" indent="0">
               <a:buNone/>
             </a:pPr>
             <a:r>
@@ -7423,13 +7990,12 @@
             <a:avLst/>
           </a:prstGeom>
           <a:noFill/>
-          <a:ln/>
         </p:spPr>
         <p:txBody>
           <a:bodyPr wrap="square" lIns="0" tIns="0" rIns="0" bIns="0" rtlCol="0" anchor="t"/>
           <a:lstStyle/>
           <a:p>
-            <a:pPr indent="0" marL="0">
+            <a:pPr marL="0" indent="0">
               <a:buNone/>
             </a:pPr>
             <a:r>
@@ -7459,13 +8025,12 @@
             <a:avLst/>
           </a:prstGeom>
           <a:noFill/>
-          <a:ln/>
         </p:spPr>
         <p:txBody>
           <a:bodyPr wrap="square" lIns="0" tIns="0" rIns="0" bIns="0" rtlCol="0" anchor="t"/>
           <a:lstStyle/>
           <a:p>
-            <a:pPr indent="0" marL="0">
+            <a:pPr marL="0" indent="0">
               <a:buNone/>
             </a:pPr>
             <a:r>
@@ -7473,9 +8038,9 @@
                 <a:solidFill>
                   <a:srgbClr val="6C5CE7"/>
                 </a:solidFill>
-                <a:latin typeface="Cambria" pitchFamily="34" charset="0"/>
-                <a:ea typeface="Cambria" pitchFamily="34" charset="-122"/>
-                <a:cs typeface="Cambria" pitchFamily="34" charset="-120"/>
+                <a:latin typeface="Cambria" panose="02040503050406030204" pitchFamily="34" charset="0"/>
+                <a:ea typeface="Cambria" panose="02040503050406030204" pitchFamily="34" charset="-122"/>
+                <a:cs typeface="Cambria" panose="02040503050406030204" pitchFamily="34" charset="-120"/>
               </a:rPr>
               <a:t>25%</a:t>
             </a:r>
@@ -7498,13 +8063,12 @@
             <a:avLst/>
           </a:prstGeom>
           <a:noFill/>
-          <a:ln/>
         </p:spPr>
         <p:txBody>
           <a:bodyPr wrap="square" lIns="0" tIns="0" rIns="0" bIns="0" rtlCol="0" anchor="t"/>
           <a:lstStyle/>
           <a:p>
-            <a:pPr indent="0" marL="0">
+            <a:pPr marL="0" indent="0">
               <a:buNone/>
             </a:pPr>
             <a:r>
@@ -7534,13 +8098,12 @@
             <a:avLst/>
           </a:prstGeom>
           <a:noFill/>
-          <a:ln/>
         </p:spPr>
         <p:txBody>
           <a:bodyPr wrap="square" lIns="0" tIns="0" rIns="0" bIns="0" rtlCol="0" anchor="t"/>
           <a:lstStyle/>
           <a:p>
-            <a:pPr indent="0" marL="0">
+            <a:pPr marL="0" indent="0">
               <a:buNone/>
             </a:pPr>
             <a:r>
@@ -7570,13 +8133,12 @@
             <a:avLst/>
           </a:prstGeom>
           <a:noFill/>
-          <a:ln/>
         </p:spPr>
         <p:txBody>
           <a:bodyPr wrap="square" lIns="0" tIns="0" rIns="0" bIns="0" rtlCol="0" anchor="t"/>
           <a:lstStyle/>
           <a:p>
-            <a:pPr indent="0" marL="0">
+            <a:pPr marL="0" indent="0">
               <a:buNone/>
             </a:pPr>
             <a:r>
@@ -7633,13 +8195,12 @@
             <a:avLst/>
           </a:prstGeom>
           <a:noFill/>
-          <a:ln/>
         </p:spPr>
         <p:txBody>
           <a:bodyPr wrap="square" lIns="0" tIns="0" rIns="0" bIns="0" rtlCol="0" anchor="t"/>
           <a:lstStyle/>
           <a:p>
-            <a:pPr indent="0" marL="0">
+            <a:pPr marL="0" indent="0">
               <a:buNone/>
             </a:pPr>
             <a:r>
@@ -7669,13 +8230,12 @@
             <a:avLst/>
           </a:prstGeom>
           <a:noFill/>
-          <a:ln/>
         </p:spPr>
         <p:txBody>
           <a:bodyPr wrap="square" lIns="0" tIns="0" rIns="0" bIns="0" rtlCol="0" anchor="t"/>
           <a:lstStyle/>
           <a:p>
-            <a:pPr indent="0" marL="0">
+            <a:pPr marL="0" indent="0">
               <a:buNone/>
             </a:pPr>
             <a:r>
@@ -7732,13 +8292,12 @@
             <a:avLst/>
           </a:prstGeom>
           <a:noFill/>
-          <a:ln/>
         </p:spPr>
         <p:txBody>
           <a:bodyPr wrap="square" lIns="0" tIns="0" rIns="0" bIns="0" rtlCol="0" anchor="t"/>
           <a:lstStyle/>
           <a:p>
-            <a:pPr indent="0" marL="0">
+            <a:pPr marL="0" indent="0">
               <a:buNone/>
             </a:pPr>
             <a:r>
@@ -7768,13 +8327,12 @@
             <a:avLst/>
           </a:prstGeom>
           <a:noFill/>
-          <a:ln/>
         </p:spPr>
         <p:txBody>
           <a:bodyPr wrap="square" lIns="0" tIns="0" rIns="0" bIns="0" rtlCol="0" anchor="t"/>
           <a:lstStyle/>
           <a:p>
-            <a:pPr indent="0" marL="0">
+            <a:pPr marL="0" indent="0">
               <a:buNone/>
             </a:pPr>
             <a:r>
@@ -7831,13 +8389,12 @@
             <a:avLst/>
           </a:prstGeom>
           <a:noFill/>
-          <a:ln/>
         </p:spPr>
         <p:txBody>
           <a:bodyPr wrap="square" lIns="0" tIns="0" rIns="0" bIns="0" rtlCol="0" anchor="t"/>
           <a:lstStyle/>
           <a:p>
-            <a:pPr indent="0" marL="0">
+            <a:pPr marL="0" indent="0">
               <a:buNone/>
             </a:pPr>
             <a:r>
@@ -7867,13 +8424,12 @@
             <a:avLst/>
           </a:prstGeom>
           <a:noFill/>
-          <a:ln/>
         </p:spPr>
         <p:txBody>
           <a:bodyPr wrap="square" lIns="0" tIns="0" rIns="0" bIns="0" rtlCol="0" anchor="t"/>
           <a:lstStyle/>
           <a:p>
-            <a:pPr indent="0" marL="0">
+            <a:pPr marL="0" indent="0">
               <a:buNone/>
             </a:pPr>
             <a:r>
@@ -7930,13 +8486,12 @@
             <a:avLst/>
           </a:prstGeom>
           <a:noFill/>
-          <a:ln/>
         </p:spPr>
         <p:txBody>
           <a:bodyPr wrap="square" lIns="0" tIns="0" rIns="0" bIns="0" rtlCol="0" anchor="t"/>
           <a:lstStyle/>
           <a:p>
-            <a:pPr indent="0" marL="0">
+            <a:pPr marL="0" indent="0">
               <a:buNone/>
             </a:pPr>
             <a:r>
@@ -7966,13 +8521,12 @@
             <a:avLst/>
           </a:prstGeom>
           <a:noFill/>
-          <a:ln/>
         </p:spPr>
         <p:txBody>
           <a:bodyPr wrap="square" lIns="0" tIns="0" rIns="0" bIns="0" rtlCol="0" anchor="t"/>
           <a:lstStyle/>
           <a:p>
-            <a:pPr indent="0" marL="0">
+            <a:pPr marL="0" indent="0">
               <a:buNone/>
             </a:pPr>
             <a:r>
@@ -8029,13 +8583,12 @@
             <a:avLst/>
           </a:prstGeom>
           <a:noFill/>
-          <a:ln/>
         </p:spPr>
         <p:txBody>
           <a:bodyPr wrap="square" lIns="0" tIns="0" rIns="0" bIns="0" rtlCol="0" anchor="t"/>
           <a:lstStyle/>
           <a:p>
-            <a:pPr indent="0" marL="0">
+            <a:pPr marL="0" indent="0">
               <a:buNone/>
             </a:pPr>
             <a:r>
@@ -8065,13 +8618,12 @@
             <a:avLst/>
           </a:prstGeom>
           <a:noFill/>
-          <a:ln/>
         </p:spPr>
         <p:txBody>
           <a:bodyPr wrap="square" lIns="0" tIns="0" rIns="0" bIns="0" rtlCol="0" anchor="t"/>
           <a:lstStyle/>
           <a:p>
-            <a:pPr indent="0" marL="0">
+            <a:pPr marL="0" indent="0">
               <a:buNone/>
             </a:pPr>
             <a:r>
@@ -8128,13 +8680,12 @@
             <a:avLst/>
           </a:prstGeom>
           <a:noFill/>
-          <a:ln/>
         </p:spPr>
         <p:txBody>
           <a:bodyPr wrap="square" lIns="0" tIns="0" rIns="0" bIns="0" rtlCol="0" anchor="t"/>
           <a:lstStyle/>
           <a:p>
-            <a:pPr indent="0" marL="0">
+            <a:pPr marL="0" indent="0">
               <a:buNone/>
             </a:pPr>
             <a:r>
@@ -8164,13 +8715,12 @@
             <a:avLst/>
           </a:prstGeom>
           <a:noFill/>
-          <a:ln/>
         </p:spPr>
         <p:txBody>
           <a:bodyPr wrap="square" lIns="0" tIns="0" rIns="0" bIns="0" rtlCol="0" anchor="t"/>
           <a:lstStyle/>
           <a:p>
-            <a:pPr indent="0" marL="0">
+            <a:pPr marL="0" indent="0">
               <a:buNone/>
             </a:pPr>
             <a:r>
@@ -8227,13 +8777,12 @@
             <a:avLst/>
           </a:prstGeom>
           <a:noFill/>
-          <a:ln/>
         </p:spPr>
         <p:txBody>
           <a:bodyPr wrap="square" lIns="0" tIns="0" rIns="0" bIns="0" rtlCol="0" anchor="t"/>
           <a:lstStyle/>
           <a:p>
-            <a:pPr indent="0" marL="0">
+            <a:pPr marL="0" indent="0">
               <a:buNone/>
             </a:pPr>
             <a:r>
@@ -8263,13 +8812,12 @@
             <a:avLst/>
           </a:prstGeom>
           <a:noFill/>
-          <a:ln/>
         </p:spPr>
         <p:txBody>
           <a:bodyPr wrap="square" lIns="0" tIns="0" rIns="0" bIns="0" rtlCol="0" anchor="t"/>
           <a:lstStyle/>
           <a:p>
-            <a:pPr indent="0" marL="0">
+            <a:pPr marL="0" indent="0">
               <a:buNone/>
             </a:pPr>
             <a:r>
@@ -8286,7 +8834,7 @@
       </p:sp>
       <p:sp>
         <p:nvSpPr>
-          <p:cNvPr id="25" name="Slide Number Placeholder 0"/>
+          <p:cNvPr id="34" name="Slide Number Placeholder 0"/>
           <p:cNvSpPr>
             <a:spLocks noGrp="1"/>
           </p:cNvSpPr>
@@ -8302,11 +8850,6 @@
           <a:prstGeom prst="rect">
             <a:avLst/>
           </a:prstGeom>
-          <a:extLst>
-            <a:ext uri="{C572A759-6A51-4108-AA02-DFA0A04FC94B}">
-              <ma14:wrappingTextBoxFlag xmlns:ma14="http://schemas.microsoft.com/office/mac/drawingml/2011/main" val="0"/>
-            </a:ext>
-          </a:extLst>
         </p:spPr>
         <p:txBody>
           <a:bodyPr/>
@@ -8322,10 +8865,301 @@
           <a:p>
             <a:pPr algn="l"/>
             <a:fld id="{F7021451-1387-4CA6-816F-3879F97B5CBC}" type="slidenum">
-              <a:rPr b="0" lang="en-US"/>
-              <a:t>5</a:t>
+              <a:rPr lang="en-US" b="0"/>
             </a:fld>
             <a:endParaRPr lang="en-US"/>
+          </a:p>
+        </p:txBody>
+      </p:sp>
+    </p:spTree>
+  </p:cSld>
+  <p:clrMapOvr>
+    <a:masterClrMapping/>
+  </p:clrMapOvr>
+</p:sld>
+</file>
+
+<file path=ppt/slides/slide8.xml><?xml version="1.0" encoding="utf-8"?>
+<p:sld xmlns:a="http://schemas.openxmlformats.org/drawingml/2006/main" xmlns:r="http://schemas.openxmlformats.org/officeDocument/2006/relationships" xmlns:p="http://schemas.openxmlformats.org/presentationml/2006/main">
+  <p:cSld>
+    <p:spTree>
+      <p:nvGrpSpPr>
+        <p:cNvPr id="1" name=""/>
+        <p:cNvGrpSpPr/>
+        <p:nvPr/>
+      </p:nvGrpSpPr>
+      <p:grpSpPr/>
+      <p:sp>
+        <p:nvSpPr>
+          <p:cNvPr id="2" name="Title 1"/>
+          <p:cNvSpPr>
+            <a:spLocks noGrp="1"/>
+          </p:cNvSpPr>
+          <p:nvPr>
+            <p:ph type="title" idx="100"/>
+          </p:nvPr>
+        </p:nvSpPr>
+        <p:spPr/>
+        <p:txBody>
+          <a:bodyPr/>
+          <a:lstStyle/>
+          <a:p>
+            <a:r>
+              <a:rPr sz="3000" b="1">
+                <a:solidFill>
+                  <a:srgbClr val="1B1F3B"/>
+                </a:solidFill>
+              </a:rPr>
+              <a:t>Git: nothing reaches GitLab until Push and MR</a:t>
+            </a:r>
+            <a:endParaRPr sz="3000" b="1">
+              <a:solidFill>
+                <a:srgbClr val="1B1F3B"/>
+              </a:solidFill>
+            </a:endParaRPr>
+          </a:p>
+        </p:txBody>
+      </p:sp>
+      <p:pic>
+        <p:nvPicPr>
+          <p:cNvPr id="3" name="Picture 2" descr="git_diagram.png"/>
+          <p:cNvPicPr>
+            <a:picLocks noChangeAspect="1"/>
+          </p:cNvPicPr>
+          <p:nvPr/>
+        </p:nvPicPr>
+        <p:blipFill>
+          <a:blip r:embed="rId1"/>
+          <a:stretch>
+            <a:fillRect/>
+          </a:stretch>
+        </p:blipFill>
+        <p:spPr>
+          <a:xfrm>
+            <a:off x="640080" y="1371600"/>
+            <a:ext cx="5466875" cy="4572000"/>
+          </a:xfrm>
+          <a:prstGeom prst="rect">
+            <a:avLst/>
+          </a:prstGeom>
+        </p:spPr>
+      </p:pic>
+      <p:sp>
+        <p:nvSpPr>
+          <p:cNvPr id="4" name="Rectangle 3"/>
+          <p:cNvSpPr/>
+          <p:nvPr/>
+        </p:nvSpPr>
+        <p:spPr>
+          <a:xfrm>
+            <a:off x="6381275" y="1371600"/>
+            <a:ext cx="5231605" cy="4572000"/>
+          </a:xfrm>
+          <a:prstGeom prst="rect">
+            <a:avLst/>
+          </a:prstGeom>
+          <a:solidFill>
+            <a:srgbClr val="F1F2F8"/>
+          </a:solidFill>
+          <a:ln>
+            <a:noFill/>
+          </a:ln>
+          <a:effectLst/>
+        </p:spPr>
+        <p:style>
+          <a:lnRef idx="1">
+            <a:schemeClr val="accent1"/>
+          </a:lnRef>
+          <a:fillRef idx="3">
+            <a:schemeClr val="accent1"/>
+          </a:fillRef>
+          <a:effectRef idx="2">
+            <a:schemeClr val="accent1"/>
+          </a:effectRef>
+          <a:fontRef idx="minor">
+            <a:schemeClr val="lt1"/>
+          </a:fontRef>
+        </p:style>
+        <p:txBody>
+          <a:bodyPr wrap="square" lIns="182880" tIns="137160" rIns="182880" rtlCol="0" anchor="t"/>
+          <a:lstStyle/>
+          <a:p>
+            <a:pPr algn="l">
+              <a:spcAft>
+                <a:spcPts val="900"/>
+              </a:spcAft>
+            </a:pPr>
+            <a:r>
+              <a:rPr sz="1300" b="1">
+                <a:solidFill>
+                  <a:srgbClr val="1B1F3B"/>
+                </a:solidFill>
+              </a:rPr>
+              <a:t>1 Feature branch  </a:t>
+            </a:r>
+            <a:r>
+              <a:rPr sz="1200">
+                <a:solidFill>
+                  <a:srgbClr val="4A4F6B"/>
+                </a:solidFill>
+              </a:rPr>
+              <a:t>created on the server, in this chat's private working copy, from the base branch; GitLab is only read</a:t>
+            </a:r>
+            <a:endParaRPr sz="1200">
+              <a:solidFill>
+                <a:srgbClr val="4A4F6B"/>
+              </a:solidFill>
+            </a:endParaRPr>
+          </a:p>
+          <a:p>
+            <a:pPr algn="l">
+              <a:spcAft>
+                <a:spcPts val="900"/>
+              </a:spcAft>
+            </a:pPr>
+            <a:r>
+              <a:rPr sz="1300" b="1">
+                <a:solidFill>
+                  <a:srgbClr val="1B1F3B"/>
+                </a:solidFill>
+              </a:rPr>
+              <a:t>2–3 Runs and edits  </a:t>
+            </a:r>
+            <a:r>
+              <a:rPr sz="1200">
+                <a:solidFill>
+                  <a:srgbClr val="4A4F6B"/>
+                </a:solidFill>
+              </a:rPr>
+              <a:t>every run and change request is one commit in your name; hand edits are committed at push; nothing is pushed automatically</a:t>
+            </a:r>
+            <a:endParaRPr sz="1200">
+              <a:solidFill>
+                <a:srgbClr val="4A4F6B"/>
+              </a:solidFill>
+            </a:endParaRPr>
+          </a:p>
+          <a:p>
+            <a:pPr algn="l">
+              <a:spcAft>
+                <a:spcPts val="900"/>
+              </a:spcAft>
+            </a:pPr>
+            <a:r>
+              <a:rPr sz="1300" b="1">
+                <a:solidFill>
+                  <a:srgbClr val="1B1F3B"/>
+                </a:solidFill>
+              </a:rPr>
+              <a:t>4 Push and MR  </a:t>
+            </a:r>
+            <a:r>
+              <a:rPr sz="1200">
+                <a:solidFill>
+                  <a:srgbClr val="4A4F6B"/>
+                </a:solidFill>
+              </a:rPr>
+              <a:t>with your own token: rebase on the base branch, your name on every commit, push with lease (never overwrites a colleague's work)</a:t>
+            </a:r>
+            <a:endParaRPr sz="1200">
+              <a:solidFill>
+                <a:srgbClr val="4A4F6B"/>
+              </a:solidFill>
+            </a:endParaRPr>
+          </a:p>
+          <a:p>
+            <a:pPr algn="l">
+              <a:spcAft>
+                <a:spcPts val="900"/>
+              </a:spcAft>
+            </a:pPr>
+            <a:r>
+              <a:rPr sz="1300" b="1">
+                <a:solidFill>
+                  <a:srgbClr val="1B1F3B"/>
+                </a:solidFill>
+              </a:rPr>
+              <a:t>5 Merge request  </a:t>
+            </a:r>
+            <a:r>
+              <a:rPr sz="1200">
+                <a:solidFill>
+                  <a:srgbClr val="4A4F6B"/>
+                </a:solidFill>
+              </a:rPr>
+              <a:t>opened in your name into the target branch, with the story, files and scores; conflicts with the target are previewed</a:t>
+            </a:r>
+            <a:endParaRPr sz="1200">
+              <a:solidFill>
+                <a:srgbClr val="4A4F6B"/>
+              </a:solidFill>
+            </a:endParaRPr>
+          </a:p>
+          <a:p>
+            <a:pPr algn="l">
+              <a:spcAft>
+                <a:spcPts val="900"/>
+              </a:spcAft>
+            </a:pPr>
+            <a:r>
+              <a:rPr sz="1300" b="1">
+                <a:solidFill>
+                  <a:srgbClr val="1B1F3B"/>
+                </a:solidFill>
+              </a:rPr>
+              <a:t>Isolation  </a:t>
+            </a:r>
+            <a:r>
+              <a:rPr sz="1200">
+                <a:solidFill>
+                  <a:srgbClr val="4A4F6B"/>
+                </a:solidFill>
+              </a:rPr>
+              <a:t>one shared read-only mirror per repository; one working copy and branch per chat; your token, your permissions</a:t>
+            </a:r>
+            <a:endParaRPr sz="1200">
+              <a:solidFill>
+                <a:srgbClr val="4A4F6B"/>
+              </a:solidFill>
+            </a:endParaRPr>
+          </a:p>
+        </p:txBody>
+      </p:sp>
+      <p:sp>
+        <p:nvSpPr>
+          <p:cNvPr id="5" name="TextBox 4"/>
+          <p:cNvSpPr txBox="1"/>
+          <p:nvPr/>
+        </p:nvSpPr>
+        <p:spPr>
+          <a:xfrm>
+            <a:off x="640080" y="6035040"/>
+            <a:ext cx="10972800" cy="365760"/>
+          </a:xfrm>
+          <a:prstGeom prst="rect">
+            <a:avLst/>
+          </a:prstGeom>
+          <a:noFill/>
+        </p:spPr>
+        <p:txBody>
+          <a:bodyPr wrap="square">
+            <a:spAutoFit/>
+          </a:bodyPr>
+          <a:lstStyle/>
+          <a:p>
+            <a:r>
+              <a:rPr sz="1250" i="1">
+                <a:solidFill>
+                  <a:srgbClr val="6C5CE7"/>
+                </a:solidFill>
+              </a:rPr>
+              <a:t>The same routine a developer follows from a laptop – branch, commit, rebase, push, merge request – on a per-chat working copy, in the developer's name.</a:t>
+            </a:r>
+            <a:endParaRPr sz="1250" i="1">
+              <a:solidFill>
+                <a:srgbClr val="6C5CE7"/>
+              </a:solidFill>
+            </a:endParaRPr>
           </a:p>
         </p:txBody>
       </p:sp>
@@ -8413,23 +9247,6 @@
         <a:font script="Viet" typeface="Times New Roman"/>
         <a:font script="Uigh" typeface="Microsoft Uighur"/>
         <a:font script="Geor" typeface="Sylfaen"/>
-        <a:font script="Armn" typeface="Arial"/>
-        <a:font script="Bugi" typeface="Leelawadee UI"/>
-        <a:font script="Bopo" typeface="Microsoft JhengHei"/>
-        <a:font script="Java" typeface="Javanese Text"/>
-        <a:font script="Lisu" typeface="Segoe UI"/>
-        <a:font script="Mymr" typeface="Myanmar Text"/>
-        <a:font script="Nkoo" typeface="Ebrima"/>
-        <a:font script="Olck" typeface="Nirmala UI"/>
-        <a:font script="Osma" typeface="Ebrima"/>
-        <a:font script="Phag" typeface="Phagspa"/>
-        <a:font script="Syrn" typeface="Estrangelo Edessa"/>
-        <a:font script="Syrj" typeface="Estrangelo Edessa"/>
-        <a:font script="Syre" typeface="Estrangelo Edessa"/>
-        <a:font script="Sora" typeface="Nirmala UI"/>
-        <a:font script="Tale" typeface="Microsoft Tai Le"/>
-        <a:font script="Talu" typeface="Microsoft New Tai Lue"/>
-        <a:font script="Tfng" typeface="Ebrima"/>
       </a:majorFont>
       <a:minorFont>
         <a:latin typeface="Calibri"/>
@@ -8465,23 +9282,6 @@
         <a:font script="Viet" typeface="Arial"/>
         <a:font script="Uigh" typeface="Microsoft Uighur"/>
         <a:font script="Geor" typeface="Sylfaen"/>
-        <a:font script="Armn" typeface="Arial"/>
-        <a:font script="Bugi" typeface="Leelawadee UI"/>
-        <a:font script="Bopo" typeface="Microsoft JhengHei"/>
-        <a:font script="Java" typeface="Javanese Text"/>
-        <a:font script="Lisu" typeface="Segoe UI"/>
-        <a:font script="Mymr" typeface="Myanmar Text"/>
-        <a:font script="Nkoo" typeface="Ebrima"/>
-        <a:font script="Olck" typeface="Nirmala UI"/>
-        <a:font script="Osma" typeface="Ebrima"/>
-        <a:font script="Phag" typeface="Phagspa"/>
-        <a:font script="Syrn" typeface="Estrangelo Edessa"/>
-        <a:font script="Syrj" typeface="Estrangelo Edessa"/>
-        <a:font script="Syre" typeface="Estrangelo Edessa"/>
-        <a:font script="Sora" typeface="Nirmala UI"/>
-        <a:font script="Tale" typeface="Microsoft Tai Le"/>
-        <a:font script="Talu" typeface="Microsoft New Tai Lue"/>
-        <a:font script="Tfng" typeface="Ebrima"/>
       </a:minorFont>
     </a:fontScheme>
     <a:fmtScheme name="Office">
@@ -8622,8 +9422,265 @@
       </a:bgFillStyleLst>
     </a:fmtScheme>
   </a:themeElements>
-  <a:objectDefaults/>
-  <a:extraClrSchemeLst/>
+  <a:extLst>
+    <a:ext uri="{05A4C25C-085E-4340-85A3-A5531E510DB2}">
+      <thm15:themeFamily xmlns:thm15="http://schemas.microsoft.com/office/thememl/2012/main" name="Office Theme" id="{62F939B6-93AF-4DB8-9C6B-D6C7DFDC589F}" vid="{4A3C46E8-61CC-4603-A589-7422A47A8E4A}"/>
+    </a:ext>
+  </a:extLst>
+</a:theme>
+</file>
+
+<file path=ppt/theme/theme2.xml><?xml version="1.0" encoding="utf-8"?>
+<a:theme xmlns:a="http://schemas.openxmlformats.org/drawingml/2006/main" name="Agile Dev Assist">
+  <a:themeElements>
+    <a:clrScheme name="Agile Dev Assist">
+      <a:dk1>
+        <a:srgbClr val="1B1F3B"/>
+      </a:dk1>
+      <a:lt1>
+        <a:srgbClr val="FFFFFF"/>
+      </a:lt1>
+      <a:dk2>
+        <a:srgbClr val="4A4F6B"/>
+      </a:dk2>
+      <a:lt2>
+        <a:srgbClr val="F1F2F8"/>
+      </a:lt2>
+      <a:accent1>
+        <a:srgbClr val="6C5CE7"/>
+      </a:accent1>
+      <a:accent2>
+        <a:srgbClr val="22B8CF"/>
+      </a:accent2>
+      <a:accent3>
+        <a:srgbClr val="2E9E6B"/>
+      </a:accent3>
+      <a:accent4>
+        <a:srgbClr val="E6A23C"/>
+      </a:accent4>
+      <a:accent5>
+        <a:srgbClr val="D94C4C"/>
+      </a:accent5>
+      <a:accent6>
+        <a:srgbClr val="9AA0BF"/>
+      </a:accent6>
+      <a:hlink>
+        <a:srgbClr val="6C5CE7"/>
+      </a:hlink>
+      <a:folHlink>
+        <a:srgbClr val="22B8CF"/>
+      </a:folHlink>
+    </a:clrScheme>
+    <a:fontScheme name="Agile Dev Assist">
+      <a:majorFont>
+        <a:latin typeface="Cambria"/>
+        <a:ea typeface=""/>
+        <a:cs typeface=""/>
+        <a:font script="Jpan" typeface="游ゴシック Light"/>
+        <a:font script="Hang" typeface="맑은 고딕"/>
+        <a:font script="Hans" typeface="等线 Light"/>
+        <a:font script="Hant" typeface="新細明體"/>
+        <a:font script="Arab" typeface="Times New Roman"/>
+        <a:font script="Hebr" typeface="Times New Roman"/>
+        <a:font script="Thai" typeface="Angsana New"/>
+        <a:font script="Ethi" typeface="Nyala"/>
+        <a:font script="Beng" typeface="Vrinda"/>
+        <a:font script="Gujr" typeface="Shruti"/>
+        <a:font script="Khmr" typeface="MoolBoran"/>
+        <a:font script="Knda" typeface="Tunga"/>
+        <a:font script="Guru" typeface="Raavi"/>
+        <a:font script="Cans" typeface="Euphemia"/>
+        <a:font script="Cher" typeface="Plantagenet Cherokee"/>
+        <a:font script="Yiii" typeface="Microsoft Yi Baiti"/>
+        <a:font script="Tibt" typeface="Microsoft Himalaya"/>
+        <a:font script="Thaa" typeface="MV Boli"/>
+        <a:font script="Deva" typeface="Mangal"/>
+        <a:font script="Telu" typeface="Gautami"/>
+        <a:font script="Taml" typeface="Latha"/>
+        <a:font script="Syrc" typeface="Estrangelo Edessa"/>
+        <a:font script="Orya" typeface="Kalinga"/>
+        <a:font script="Mlym" typeface="Kartika"/>
+        <a:font script="Laoo" typeface="DokChampa"/>
+        <a:font script="Sinh" typeface="Iskoola Pota"/>
+        <a:font script="Mong" typeface="Mongolian Baiti"/>
+        <a:font script="Viet" typeface="Times New Roman"/>
+        <a:font script="Uigh" typeface="Microsoft Uighur"/>
+        <a:font script="Geor" typeface="Sylfaen"/>
+      </a:majorFont>
+      <a:minorFont>
+        <a:latin typeface="Calibri"/>
+        <a:ea typeface=""/>
+        <a:cs typeface=""/>
+        <a:font script="Jpan" typeface="游ゴシック"/>
+        <a:font script="Hang" typeface="맑은 고딕"/>
+        <a:font script="Hans" typeface="等线"/>
+        <a:font script="Hant" typeface="新細明體"/>
+        <a:font script="Arab" typeface="Arial"/>
+        <a:font script="Hebr" typeface="Arial"/>
+        <a:font script="Thai" typeface="Cordia New"/>
+        <a:font script="Ethi" typeface="Nyala"/>
+        <a:font script="Beng" typeface="Vrinda"/>
+        <a:font script="Gujr" typeface="Shruti"/>
+        <a:font script="Khmr" typeface="DaunPenh"/>
+        <a:font script="Knda" typeface="Tunga"/>
+        <a:font script="Guru" typeface="Raavi"/>
+        <a:font script="Cans" typeface="Euphemia"/>
+        <a:font script="Cher" typeface="Plantagenet Cherokee"/>
+        <a:font script="Yiii" typeface="Microsoft Yi Baiti"/>
+        <a:font script="Tibt" typeface="Microsoft Himalaya"/>
+        <a:font script="Thaa" typeface="MV Boli"/>
+        <a:font script="Deva" typeface="Mangal"/>
+        <a:font script="Telu" typeface="Gautami"/>
+        <a:font script="Taml" typeface="Latha"/>
+        <a:font script="Syrc" typeface="Estrangelo Edessa"/>
+        <a:font script="Orya" typeface="Kalinga"/>
+        <a:font script="Mlym" typeface="Kartika"/>
+        <a:font script="Laoo" typeface="DokChampa"/>
+        <a:font script="Sinh" typeface="Iskoola Pota"/>
+        <a:font script="Mong" typeface="Mongolian Baiti"/>
+        <a:font script="Viet" typeface="Arial"/>
+        <a:font script="Uigh" typeface="Microsoft Uighur"/>
+        <a:font script="Geor" typeface="Sylfaen"/>
+      </a:minorFont>
+    </a:fontScheme>
+    <a:fmtScheme name="Office">
+      <a:fillStyleLst>
+        <a:solidFill>
+          <a:schemeClr val="phClr"/>
+        </a:solidFill>
+        <a:gradFill rotWithShape="1">
+          <a:gsLst>
+            <a:gs pos="0">
+              <a:schemeClr val="phClr">
+                <a:lumMod val="110000"/>
+                <a:satMod val="105000"/>
+                <a:tint val="67000"/>
+              </a:schemeClr>
+            </a:gs>
+            <a:gs pos="50000">
+              <a:schemeClr val="phClr">
+                <a:lumMod val="105000"/>
+                <a:satMod val="103000"/>
+                <a:tint val="73000"/>
+              </a:schemeClr>
+            </a:gs>
+            <a:gs pos="100000">
+              <a:schemeClr val="phClr">
+                <a:lumMod val="105000"/>
+                <a:satMod val="109000"/>
+                <a:tint val="81000"/>
+              </a:schemeClr>
+            </a:gs>
+          </a:gsLst>
+          <a:lin ang="5400000" scaled="0"/>
+        </a:gradFill>
+        <a:gradFill rotWithShape="1">
+          <a:gsLst>
+            <a:gs pos="0">
+              <a:schemeClr val="phClr">
+                <a:satMod val="103000"/>
+                <a:lumMod val="102000"/>
+                <a:tint val="94000"/>
+              </a:schemeClr>
+            </a:gs>
+            <a:gs pos="50000">
+              <a:schemeClr val="phClr">
+                <a:satMod val="110000"/>
+                <a:lumMod val="100000"/>
+                <a:shade val="100000"/>
+              </a:schemeClr>
+            </a:gs>
+            <a:gs pos="100000">
+              <a:schemeClr val="phClr">
+                <a:lumMod val="99000"/>
+                <a:satMod val="120000"/>
+                <a:shade val="78000"/>
+              </a:schemeClr>
+            </a:gs>
+          </a:gsLst>
+          <a:lin ang="5400000" scaled="0"/>
+        </a:gradFill>
+      </a:fillStyleLst>
+      <a:lnStyleLst>
+        <a:ln w="6350" cap="flat" cmpd="sng" algn="ctr">
+          <a:solidFill>
+            <a:schemeClr val="phClr"/>
+          </a:solidFill>
+          <a:prstDash val="solid"/>
+          <a:miter lim="800000"/>
+        </a:ln>
+        <a:ln w="12700" cap="flat" cmpd="sng" algn="ctr">
+          <a:solidFill>
+            <a:schemeClr val="phClr"/>
+          </a:solidFill>
+          <a:prstDash val="solid"/>
+          <a:miter lim="800000"/>
+        </a:ln>
+        <a:ln w="19050" cap="flat" cmpd="sng" algn="ctr">
+          <a:solidFill>
+            <a:schemeClr val="phClr"/>
+          </a:solidFill>
+          <a:prstDash val="solid"/>
+          <a:miter lim="800000"/>
+        </a:ln>
+      </a:lnStyleLst>
+      <a:effectStyleLst>
+        <a:effectStyle>
+          <a:effectLst/>
+        </a:effectStyle>
+        <a:effectStyle>
+          <a:effectLst/>
+        </a:effectStyle>
+        <a:effectStyle>
+          <a:effectLst>
+            <a:outerShdw blurRad="57150" dist="19050" dir="5400000" algn="ctr" rotWithShape="0">
+              <a:srgbClr val="000000">
+                <a:alpha val="63000"/>
+              </a:srgbClr>
+            </a:outerShdw>
+          </a:effectLst>
+        </a:effectStyle>
+      </a:effectStyleLst>
+      <a:bgFillStyleLst>
+        <a:solidFill>
+          <a:schemeClr val="phClr"/>
+        </a:solidFill>
+        <a:solidFill>
+          <a:schemeClr val="phClr">
+            <a:tint val="95000"/>
+            <a:satMod val="170000"/>
+          </a:schemeClr>
+        </a:solidFill>
+        <a:gradFill rotWithShape="1">
+          <a:gsLst>
+            <a:gs pos="0">
+              <a:schemeClr val="phClr">
+                <a:tint val="93000"/>
+                <a:satMod val="150000"/>
+                <a:shade val="98000"/>
+                <a:lumMod val="102000"/>
+              </a:schemeClr>
+            </a:gs>
+            <a:gs pos="50000">
+              <a:schemeClr val="phClr">
+                <a:tint val="98000"/>
+                <a:satMod val="130000"/>
+                <a:shade val="90000"/>
+                <a:lumMod val="103000"/>
+              </a:schemeClr>
+            </a:gs>
+            <a:gs pos="100000">
+              <a:schemeClr val="phClr">
+                <a:shade val="63000"/>
+                <a:satMod val="120000"/>
+              </a:schemeClr>
+            </a:gs>
+          </a:gsLst>
+          <a:lin ang="5400000" scaled="0"/>
+        </a:gradFill>
+      </a:bgFillStyleLst>
+    </a:fmtScheme>
+  </a:themeElements>
   <a:extLst>
     <a:ext uri="{05A4C25C-085E-4340-85A3-A5531E510DB2}">
       <thm15:themeFamily xmlns:thm15="http://schemas.microsoft.com/office/thememl/2012/main" name="Office Theme" id="{62F939B6-93AF-4DB8-9C6B-D6C7DFDC589F}" vid="{4A3C46E8-61CC-4603-A589-7422A47A8E4A}"/>
